--- a/docs/deck.pptx
+++ b/docs/deck.pptx
@@ -15,6 +15,7 @@
     <p:sldId id="263" r:id="rId14"/>
     <p:sldId id="264" r:id="rId15"/>
     <p:sldId id="265" r:id="rId16"/>
+    <p:sldId id="266" r:id="rId17"/>
   </p:sldIdLst>
   <p:sldSz cx="12191695" cy="6858000" type="screen4x3"/>
   <p:notesSz cx="6858000" cy="9144000"/>
@@ -3414,7 +3415,7 @@
                 </a:solidFill>
                 <a:latin typeface="Consolas"/>
               </a:rPr>
-              <a:t>89,802</a:t>
+              <a:t>90,195</a:t>
             </a:r>
           </a:p>
         </p:txBody>
@@ -3492,7 +3493,7 @@
                 </a:solidFill>
                 <a:latin typeface="Consolas"/>
               </a:rPr>
-              <a:t>-10,198</a:t>
+              <a:t>-9,805</a:t>
             </a:r>
           </a:p>
         </p:txBody>
@@ -3648,7 +3649,7 @@
                 </a:solidFill>
                 <a:latin typeface="Consolas"/>
               </a:rPr>
-              <a:t>456</a:t>
+              <a:t>506</a:t>
             </a:r>
           </a:p>
         </p:txBody>
@@ -3735,7 +3736,7 @@
                 </a:solidFill>
                 <a:latin typeface="Consolas"/>
               </a:rPr>
-              <a:t>Alpaca AI Trading Agents Hackathon  ·  paper account PA3S85G7JUS0  ·  every figure read back through the Alpaca CLI  ·  as of 2026-09-01 14:03 ET</a:t>
+              <a:t>Alpaca AI Trading Agents Hackathon  ·  paper account PA3S85G7JUS0  ·  every figure read back through the Alpaca CLI  ·  as of 2026-09-01 16:06 ET</a:t>
             </a:r>
           </a:p>
         </p:txBody>
@@ -3802,6 +3803,694 @@
           </a:p>
         </p:txBody>
       </p:sp>
+      <p:sp>
+        <p:nvSpPr>
+          <p:cNvPr id="3" name="TextBox 2"/>
+          <p:cNvSpPr txBox="1"/>
+          <p:nvPr/>
+        </p:nvSpPr>
+        <p:spPr>
+          <a:xfrm>
+            <a:off x="731520" y="502920"/>
+            <a:ext cx="10698480" cy="365760"/>
+          </a:xfrm>
+          <a:prstGeom prst="rect">
+            <a:avLst/>
+          </a:prstGeom>
+          <a:noFill/>
+        </p:spPr>
+        <p:txBody>
+          <a:bodyPr wrap="square">
+            <a:spAutoFit/>
+          </a:bodyPr>
+          <a:lstStyle/>
+          <a:p>
+            <a:pPr algn="l">
+              <a:lnSpc>
+                <a:spcPct val="115000"/>
+              </a:lnSpc>
+            </a:pPr>
+            <a:r>
+              <a:rPr sz="1300" b="1">
+                <a:solidFill>
+                  <a:srgbClr val="8A94A5"/>
+                </a:solidFill>
+                <a:latin typeface="Consolas"/>
+              </a:rPr>
+              <a:t>WHAT IS HONEST ABOUT THIS</a:t>
+            </a:r>
+          </a:p>
+        </p:txBody>
+      </p:sp>
+      <p:sp>
+        <p:nvSpPr>
+          <p:cNvPr id="4" name="TextBox 3"/>
+          <p:cNvSpPr txBox="1"/>
+          <p:nvPr/>
+        </p:nvSpPr>
+        <p:spPr>
+          <a:xfrm>
+            <a:off x="731520" y="868680"/>
+            <a:ext cx="10698480" cy="914400"/>
+          </a:xfrm>
+          <a:prstGeom prst="rect">
+            <a:avLst/>
+          </a:prstGeom>
+          <a:noFill/>
+        </p:spPr>
+        <p:txBody>
+          <a:bodyPr wrap="square">
+            <a:spAutoFit/>
+          </a:bodyPr>
+          <a:lstStyle/>
+          <a:p>
+            <a:pPr algn="l">
+              <a:lnSpc>
+                <a:spcPct val="105000"/>
+              </a:lnSpc>
+            </a:pPr>
+            <a:r>
+              <a:rPr sz="3000" b="1">
+                <a:solidFill>
+                  <a:srgbClr val="E8ECF2"/>
+                </a:solidFill>
+                <a:latin typeface="Georgia"/>
+              </a:rPr>
+              <a:t>The parts that are not finished</a:t>
+            </a:r>
+          </a:p>
+        </p:txBody>
+      </p:sp>
+      <p:sp>
+        <p:nvSpPr>
+          <p:cNvPr id="5" name="Rectangle 4"/>
+          <p:cNvSpPr/>
+          <p:nvPr/>
+        </p:nvSpPr>
+        <p:spPr>
+          <a:xfrm>
+            <a:off x="731520" y="1783080"/>
+            <a:ext cx="10698480" cy="9525"/>
+          </a:xfrm>
+          <a:prstGeom prst="rect">
+            <a:avLst/>
+          </a:prstGeom>
+          <a:solidFill>
+            <a:srgbClr val="242C38"/>
+          </a:solidFill>
+          <a:ln>
+            <a:noFill/>
+          </a:ln>
+          <a:effectLst/>
+        </p:spPr>
+        <p:style>
+          <a:lnRef idx="1">
+            <a:schemeClr val="accent1"/>
+          </a:lnRef>
+          <a:fillRef idx="3">
+            <a:schemeClr val="accent1"/>
+          </a:fillRef>
+          <a:effectRef idx="2">
+            <a:schemeClr val="accent1"/>
+          </a:effectRef>
+          <a:fontRef idx="minor">
+            <a:schemeClr val="lt1"/>
+          </a:fontRef>
+        </p:style>
+        <p:txBody>
+          <a:bodyPr rtlCol="0" anchor="ctr"/>
+          <a:lstStyle/>
+          <a:p>
+            <a:pPr algn="ctr"/>
+          </a:p>
+        </p:txBody>
+      </p:sp>
+      <p:sp>
+        <p:nvSpPr>
+          <p:cNvPr id="6" name="TextBox 5"/>
+          <p:cNvSpPr txBox="1"/>
+          <p:nvPr/>
+        </p:nvSpPr>
+        <p:spPr>
+          <a:xfrm>
+            <a:off x="731520" y="2148840"/>
+            <a:ext cx="10698480" cy="502920"/>
+          </a:xfrm>
+          <a:prstGeom prst="rect">
+            <a:avLst/>
+          </a:prstGeom>
+          <a:noFill/>
+        </p:spPr>
+        <p:txBody>
+          <a:bodyPr wrap="square">
+            <a:spAutoFit/>
+          </a:bodyPr>
+          <a:lstStyle/>
+          <a:p>
+            <a:pPr algn="l">
+              <a:lnSpc>
+                <a:spcPct val="115000"/>
+              </a:lnSpc>
+            </a:pPr>
+            <a:r>
+              <a:rPr sz="1600" b="1">
+                <a:solidFill>
+                  <a:srgbClr val="8AA6EF"/>
+                </a:solidFill>
+                <a:latin typeface="Georgia"/>
+              </a:rPr>
+              <a:t>Untuned.  </a:t>
+            </a:r>
+            <a:r>
+              <a:rPr sz="1600" b="0">
+                <a:solidFill>
+                  <a:srgbClr val="E8ECF2"/>
+                </a:solidFill>
+                <a:latin typeface="Georgia"/>
+              </a:rPr>
+              <a:t>The grid parameters come from the author's cTrader Forex bot. They are not tuned for options, or for a one-week window.</a:t>
+            </a:r>
+          </a:p>
+        </p:txBody>
+      </p:sp>
+      <p:sp>
+        <p:nvSpPr>
+          <p:cNvPr id="7" name="TextBox 6"/>
+          <p:cNvSpPr txBox="1"/>
+          <p:nvPr/>
+        </p:nvSpPr>
+        <p:spPr>
+          <a:xfrm>
+            <a:off x="731520" y="2953512"/>
+            <a:ext cx="10698480" cy="502920"/>
+          </a:xfrm>
+          <a:prstGeom prst="rect">
+            <a:avLst/>
+          </a:prstGeom>
+          <a:noFill/>
+        </p:spPr>
+        <p:txBody>
+          <a:bodyPr wrap="square">
+            <a:spAutoFit/>
+          </a:bodyPr>
+          <a:lstStyle/>
+          <a:p>
+            <a:pPr algn="l">
+              <a:lnSpc>
+                <a:spcPct val="115000"/>
+              </a:lnSpc>
+            </a:pPr>
+            <a:r>
+              <a:rPr sz="1600" b="1">
+                <a:solidFill>
+                  <a:srgbClr val="8AA6EF"/>
+                </a:solidFill>
+                <a:latin typeface="Georgia"/>
+              </a:rPr>
+              <a:t>An unmeasured tail.  </a:t>
+            </a:r>
+            <a:r>
+              <a:rPr sz="1600" b="0">
+                <a:solidFill>
+                  <a:srgbClr val="E8ECF2"/>
+                </a:solidFill>
+                <a:latin typeface="Georgia"/>
+              </a:rPr>
+              <a:t>Alpaca option data begins 2024-02 and holds no sustained bear market. The tail is bounded by construction — every position is a spread — but unmeasured.</a:t>
+            </a:r>
+          </a:p>
+        </p:txBody>
+      </p:sp>
+      <p:sp>
+        <p:nvSpPr>
+          <p:cNvPr id="8" name="TextBox 7"/>
+          <p:cNvSpPr txBox="1"/>
+          <p:nvPr/>
+        </p:nvSpPr>
+        <p:spPr>
+          <a:xfrm>
+            <a:off x="731520" y="3758184"/>
+            <a:ext cx="10698480" cy="502920"/>
+          </a:xfrm>
+          <a:prstGeom prst="rect">
+            <a:avLst/>
+          </a:prstGeom>
+          <a:noFill/>
+        </p:spPr>
+        <p:txBody>
+          <a:bodyPr wrap="square">
+            <a:spAutoFit/>
+          </a:bodyPr>
+          <a:lstStyle/>
+          <a:p>
+            <a:pPr algn="l">
+              <a:lnSpc>
+                <a:spcPct val="115000"/>
+              </a:lnSpc>
+            </a:pPr>
+            <a:r>
+              <a:rPr sz="1600" b="1">
+                <a:solidFill>
+                  <a:srgbClr val="8AA6EF"/>
+                </a:solidFill>
+                <a:latin typeface="Georgia"/>
+              </a:rPr>
+              <a:t>A martingale, deliberately.  </a:t>
+            </a:r>
+            <a:r>
+              <a:rPr sz="1600" b="0">
+                <a:solidFill>
+                  <a:srgbClr val="E8ECF2"/>
+                </a:solidFill>
+                <a:latin typeface="Georgia"/>
+              </a:rPr>
+              <a:t>It adds into a losing position. That is the strategy, not a defect, and the drawdown on this page is what it looks like.</a:t>
+            </a:r>
+          </a:p>
+        </p:txBody>
+      </p:sp>
+      <p:sp>
+        <p:nvSpPr>
+          <p:cNvPr id="9" name="TextBox 8"/>
+          <p:cNvSpPr txBox="1"/>
+          <p:nvPr/>
+        </p:nvSpPr>
+        <p:spPr>
+          <a:xfrm>
+            <a:off x="731520" y="4562856"/>
+            <a:ext cx="10698480" cy="502920"/>
+          </a:xfrm>
+          <a:prstGeom prst="rect">
+            <a:avLst/>
+          </a:prstGeom>
+          <a:noFill/>
+        </p:spPr>
+        <p:txBody>
+          <a:bodyPr wrap="square">
+            <a:spAutoFit/>
+          </a:bodyPr>
+          <a:lstStyle/>
+          <a:p>
+            <a:pPr algn="l">
+              <a:lnSpc>
+                <a:spcPct val="115000"/>
+              </a:lnSpc>
+            </a:pPr>
+            <a:r>
+              <a:rPr sz="1600" b="1">
+                <a:solidFill>
+                  <a:srgbClr val="8AA6EF"/>
+                </a:solidFill>
+                <a:latin typeface="Georgia"/>
+              </a:rPr>
+              <a:t>The AI sizes only.  </a:t>
+            </a:r>
+            <a:r>
+              <a:rPr sz="1600" b="0">
+                <a:solidFill>
+                  <a:srgbClr val="E8ECF2"/>
+                </a:solidFill>
+                <a:latin typeface="Georgia"/>
+              </a:rPr>
+              <a:t>Underlying choice and DTE/strike policy are still rules, not judgements.</a:t>
+            </a:r>
+          </a:p>
+        </p:txBody>
+      </p:sp>
+      <p:sp>
+        <p:nvSpPr>
+          <p:cNvPr id="10" name="TextBox 9"/>
+          <p:cNvSpPr txBox="1"/>
+          <p:nvPr/>
+        </p:nvSpPr>
+        <p:spPr>
+          <a:xfrm>
+            <a:off x="731520" y="5486400"/>
+            <a:ext cx="2674620" cy="274320"/>
+          </a:xfrm>
+          <a:prstGeom prst="rect">
+            <a:avLst/>
+          </a:prstGeom>
+          <a:noFill/>
+        </p:spPr>
+        <p:txBody>
+          <a:bodyPr wrap="square">
+            <a:spAutoFit/>
+          </a:bodyPr>
+          <a:lstStyle/>
+          <a:p>
+            <a:pPr algn="l">
+              <a:lnSpc>
+                <a:spcPct val="115000"/>
+              </a:lnSpc>
+            </a:pPr>
+            <a:r>
+              <a:rPr sz="1100" b="1">
+                <a:solidFill>
+                  <a:srgbClr val="8A94A5"/>
+                </a:solidFill>
+                <a:latin typeface="Consolas"/>
+              </a:rPr>
+              <a:t>EQUITY</a:t>
+            </a:r>
+          </a:p>
+        </p:txBody>
+      </p:sp>
+      <p:sp>
+        <p:nvSpPr>
+          <p:cNvPr id="11" name="TextBox 10"/>
+          <p:cNvSpPr txBox="1"/>
+          <p:nvPr/>
+        </p:nvSpPr>
+        <p:spPr>
+          <a:xfrm>
+            <a:off x="731520" y="5742432"/>
+            <a:ext cx="2674620" cy="548640"/>
+          </a:xfrm>
+          <a:prstGeom prst="rect">
+            <a:avLst/>
+          </a:prstGeom>
+          <a:noFill/>
+        </p:spPr>
+        <p:txBody>
+          <a:bodyPr wrap="square">
+            <a:spAutoFit/>
+          </a:bodyPr>
+          <a:lstStyle/>
+          <a:p>
+            <a:pPr algn="l">
+              <a:lnSpc>
+                <a:spcPct val="115000"/>
+              </a:lnSpc>
+            </a:pPr>
+            <a:r>
+              <a:rPr sz="2200" b="1">
+                <a:solidFill>
+                  <a:srgbClr val="E8ECF2"/>
+                </a:solidFill>
+                <a:latin typeface="Consolas"/>
+              </a:rPr>
+              <a:t>90,195</a:t>
+            </a:r>
+          </a:p>
+        </p:txBody>
+      </p:sp>
+      <p:sp>
+        <p:nvSpPr>
+          <p:cNvPr id="12" name="TextBox 11"/>
+          <p:cNvSpPr txBox="1"/>
+          <p:nvPr/>
+        </p:nvSpPr>
+        <p:spPr>
+          <a:xfrm>
+            <a:off x="3406139" y="5486400"/>
+            <a:ext cx="2674620" cy="274320"/>
+          </a:xfrm>
+          <a:prstGeom prst="rect">
+            <a:avLst/>
+          </a:prstGeom>
+          <a:noFill/>
+        </p:spPr>
+        <p:txBody>
+          <a:bodyPr wrap="square">
+            <a:spAutoFit/>
+          </a:bodyPr>
+          <a:lstStyle/>
+          <a:p>
+            <a:pPr algn="l">
+              <a:lnSpc>
+                <a:spcPct val="115000"/>
+              </a:lnSpc>
+            </a:pPr>
+            <a:r>
+              <a:rPr sz="1100" b="1">
+                <a:solidFill>
+                  <a:srgbClr val="8A94A5"/>
+                </a:solidFill>
+                <a:latin typeface="Consolas"/>
+              </a:rPr>
+              <a:t>P&amp;L</a:t>
+            </a:r>
+          </a:p>
+        </p:txBody>
+      </p:sp>
+      <p:sp>
+        <p:nvSpPr>
+          <p:cNvPr id="13" name="TextBox 12"/>
+          <p:cNvSpPr txBox="1"/>
+          <p:nvPr/>
+        </p:nvSpPr>
+        <p:spPr>
+          <a:xfrm>
+            <a:off x="3406139" y="5742432"/>
+            <a:ext cx="2674620" cy="548640"/>
+          </a:xfrm>
+          <a:prstGeom prst="rect">
+            <a:avLst/>
+          </a:prstGeom>
+          <a:noFill/>
+        </p:spPr>
+        <p:txBody>
+          <a:bodyPr wrap="square">
+            <a:spAutoFit/>
+          </a:bodyPr>
+          <a:lstStyle/>
+          <a:p>
+            <a:pPr algn="l">
+              <a:lnSpc>
+                <a:spcPct val="115000"/>
+              </a:lnSpc>
+            </a:pPr>
+            <a:r>
+              <a:rPr sz="2200" b="1">
+                <a:solidFill>
+                  <a:srgbClr val="E06A4E"/>
+                </a:solidFill>
+                <a:latin typeface="Consolas"/>
+              </a:rPr>
+              <a:t>-9,805  (-9.81 %)</a:t>
+            </a:r>
+          </a:p>
+        </p:txBody>
+      </p:sp>
+      <p:sp>
+        <p:nvSpPr>
+          <p:cNvPr id="14" name="TextBox 13"/>
+          <p:cNvSpPr txBox="1"/>
+          <p:nvPr/>
+        </p:nvSpPr>
+        <p:spPr>
+          <a:xfrm>
+            <a:off x="6080759" y="5486400"/>
+            <a:ext cx="2674620" cy="274320"/>
+          </a:xfrm>
+          <a:prstGeom prst="rect">
+            <a:avLst/>
+          </a:prstGeom>
+          <a:noFill/>
+        </p:spPr>
+        <p:txBody>
+          <a:bodyPr wrap="square">
+            <a:spAutoFit/>
+          </a:bodyPr>
+          <a:lstStyle/>
+          <a:p>
+            <a:pPr algn="l">
+              <a:lnSpc>
+                <a:spcPct val="115000"/>
+              </a:lnSpc>
+            </a:pPr>
+            <a:r>
+              <a:rPr sz="1100" b="1">
+                <a:solidFill>
+                  <a:srgbClr val="8A94A5"/>
+                </a:solidFill>
+                <a:latin typeface="Consolas"/>
+              </a:rPr>
+              <a:t>OPEN SPREADS</a:t>
+            </a:r>
+          </a:p>
+        </p:txBody>
+      </p:sp>
+      <p:sp>
+        <p:nvSpPr>
+          <p:cNvPr id="15" name="TextBox 14"/>
+          <p:cNvSpPr txBox="1"/>
+          <p:nvPr/>
+        </p:nvSpPr>
+        <p:spPr>
+          <a:xfrm>
+            <a:off x="6080759" y="5742432"/>
+            <a:ext cx="2674620" cy="548640"/>
+          </a:xfrm>
+          <a:prstGeom prst="rect">
+            <a:avLst/>
+          </a:prstGeom>
+          <a:noFill/>
+        </p:spPr>
+        <p:txBody>
+          <a:bodyPr wrap="square">
+            <a:spAutoFit/>
+          </a:bodyPr>
+          <a:lstStyle/>
+          <a:p>
+            <a:pPr algn="l">
+              <a:lnSpc>
+                <a:spcPct val="115000"/>
+              </a:lnSpc>
+            </a:pPr>
+            <a:r>
+              <a:rPr sz="2200" b="1">
+                <a:solidFill>
+                  <a:srgbClr val="E8ECF2"/>
+                </a:solidFill>
+                <a:latin typeface="Consolas"/>
+              </a:rPr>
+              <a:t>51</a:t>
+            </a:r>
+          </a:p>
+        </p:txBody>
+      </p:sp>
+      <p:sp>
+        <p:nvSpPr>
+          <p:cNvPr id="16" name="TextBox 15"/>
+          <p:cNvSpPr txBox="1"/>
+          <p:nvPr/>
+        </p:nvSpPr>
+        <p:spPr>
+          <a:xfrm>
+            <a:off x="8755380" y="5486400"/>
+            <a:ext cx="2674620" cy="274320"/>
+          </a:xfrm>
+          <a:prstGeom prst="rect">
+            <a:avLst/>
+          </a:prstGeom>
+          <a:noFill/>
+        </p:spPr>
+        <p:txBody>
+          <a:bodyPr wrap="square">
+            <a:spAutoFit/>
+          </a:bodyPr>
+          <a:lstStyle/>
+          <a:p>
+            <a:pPr algn="l">
+              <a:lnSpc>
+                <a:spcPct val="115000"/>
+              </a:lnSpc>
+            </a:pPr>
+            <a:r>
+              <a:rPr sz="1100" b="1">
+                <a:solidFill>
+                  <a:srgbClr val="8A94A5"/>
+                </a:solidFill>
+                <a:latin typeface="Consolas"/>
+              </a:rPr>
+              <a:t>RESIDUAL</a:t>
+            </a:r>
+          </a:p>
+        </p:txBody>
+      </p:sp>
+      <p:sp>
+        <p:nvSpPr>
+          <p:cNvPr id="17" name="TextBox 16"/>
+          <p:cNvSpPr txBox="1"/>
+          <p:nvPr/>
+        </p:nvSpPr>
+        <p:spPr>
+          <a:xfrm>
+            <a:off x="8755380" y="5742432"/>
+            <a:ext cx="2674620" cy="548640"/>
+          </a:xfrm>
+          <a:prstGeom prst="rect">
+            <a:avLst/>
+          </a:prstGeom>
+          <a:noFill/>
+        </p:spPr>
+        <p:txBody>
+          <a:bodyPr wrap="square">
+            <a:spAutoFit/>
+          </a:bodyPr>
+          <a:lstStyle/>
+          <a:p>
+            <a:pPr algn="l">
+              <a:lnSpc>
+                <a:spcPct val="115000"/>
+              </a:lnSpc>
+            </a:pPr>
+            <a:r>
+              <a:rPr sz="2200" b="1">
+                <a:solidFill>
+                  <a:srgbClr val="8AA6EF"/>
+                </a:solidFill>
+                <a:latin typeface="Consolas"/>
+              </a:rPr>
+              <a:t>+0.0000</a:t>
+            </a:r>
+          </a:p>
+        </p:txBody>
+      </p:sp>
+    </p:spTree>
+  </p:cSld>
+  <p:clrMapOvr>
+    <a:masterClrMapping/>
+  </p:clrMapOvr>
+</p:sld>
+</file>
+
+<file path=ppt/slides/slide11.xml><?xml version="1.0" encoding="utf-8"?>
+<p:sld xmlns:a="http://schemas.openxmlformats.org/drawingml/2006/main" xmlns:p="http://schemas.openxmlformats.org/presentationml/2006/main" xmlns:r="http://schemas.openxmlformats.org/officeDocument/2006/relationships">
+  <p:cSld>
+    <p:spTree>
+      <p:nvGrpSpPr>
+        <p:cNvPr id="1" name=""/>
+        <p:cNvGrpSpPr/>
+        <p:nvPr/>
+      </p:nvGrpSpPr>
+      <p:grpSpPr/>
+      <p:sp>
+        <p:nvSpPr>
+          <p:cNvPr id="2" name="Rectangle 1"/>
+          <p:cNvSpPr/>
+          <p:nvPr/>
+        </p:nvSpPr>
+        <p:spPr>
+          <a:xfrm>
+            <a:off x="0" y="0"/>
+            <a:ext cx="12191695" cy="6858000"/>
+          </a:xfrm>
+          <a:prstGeom prst="rect">
+            <a:avLst/>
+          </a:prstGeom>
+          <a:solidFill>
+            <a:srgbClr val="0C0F14"/>
+          </a:solidFill>
+          <a:ln>
+            <a:noFill/>
+          </a:ln>
+          <a:effectLst/>
+        </p:spPr>
+        <p:style>
+          <a:lnRef idx="1">
+            <a:schemeClr val="accent1"/>
+          </a:lnRef>
+          <a:fillRef idx="3">
+            <a:schemeClr val="accent1"/>
+          </a:fillRef>
+          <a:effectRef idx="2">
+            <a:schemeClr val="accent1"/>
+          </a:effectRef>
+          <a:fontRef idx="minor">
+            <a:schemeClr val="lt1"/>
+          </a:fontRef>
+        </p:style>
+        <p:txBody>
+          <a:bodyPr rtlCol="0" anchor="ctr"/>
+          <a:lstStyle/>
+          <a:p>
+            <a:pPr algn="ctr"/>
+          </a:p>
+        </p:txBody>
+      </p:sp>
       <p:pic>
         <p:nvPicPr>
           <p:cNvPr id="3" name="Picture 2" descr="cover.png"/>
@@ -6408,7 +7097,7 @@
                 </a:solidFill>
                 <a:latin typeface="Consolas"/>
               </a:rPr>
-              <a:t>   89,801.93 - 100,000   =  +1,889.00 -12,067.00 - 15.12 - 4.95</a:t>
+              <a:t>   90,194.58 - 100,000   =  +2,168.00 -11,952.00 - 15.12 - 6.30</a:t>
             </a:r>
           </a:p>
           <a:p>
@@ -7020,7 +7709,7 @@
                 </a:solidFill>
                 <a:latin typeface="Georgia"/>
               </a:rPr>
-              <a:t>built from the account data behind it. 90 tests.</a:t>
+              <a:t>built from the account data behind it. 93 tests.</a:t>
             </a:r>
           </a:p>
         </p:txBody>
@@ -7169,7 +7858,7 @@
                 </a:solidFill>
                 <a:latin typeface="Consolas"/>
               </a:rPr>
-              <a:t>WHAT IS HONEST ABOUT THIS</a:t>
+              <a:t>WHAT THE MEASURING FOUND</a:t>
             </a:r>
           </a:p>
         </p:txBody>
@@ -7208,7 +7897,7 @@
                 </a:solidFill>
                 <a:latin typeface="Georgia"/>
               </a:rPr>
-              <a:t>The parts that are not finished</a:t>
+              <a:t>The backtest never paid the bid/ask</a:t>
             </a:r>
           </a:p>
         </p:txBody>
@@ -7259,14 +7948,60 @@
       </p:sp>
       <p:sp>
         <p:nvSpPr>
-          <p:cNvPr id="6" name="TextBox 5"/>
+          <p:cNvPr id="6" name="Rectangle 5"/>
+          <p:cNvSpPr/>
+          <p:nvPr/>
+        </p:nvSpPr>
+        <p:spPr>
+          <a:xfrm>
+            <a:off x="731520" y="2148840"/>
+            <a:ext cx="10698480" cy="1857756"/>
+          </a:xfrm>
+          <a:prstGeom prst="rect">
+            <a:avLst/>
+          </a:prstGeom>
+          <a:solidFill>
+            <a:srgbClr val="141922"/>
+          </a:solidFill>
+          <a:ln>
+            <a:solidFill>
+              <a:srgbClr val="242C38"/>
+            </a:solidFill>
+          </a:ln>
+          <a:effectLst/>
+        </p:spPr>
+        <p:style>
+          <a:lnRef idx="1">
+            <a:schemeClr val="accent1"/>
+          </a:lnRef>
+          <a:fillRef idx="3">
+            <a:schemeClr val="accent1"/>
+          </a:fillRef>
+          <a:effectRef idx="2">
+            <a:schemeClr val="accent1"/>
+          </a:effectRef>
+          <a:fontRef idx="minor">
+            <a:schemeClr val="lt1"/>
+          </a:fontRef>
+        </p:style>
+        <p:txBody>
+          <a:bodyPr rtlCol="0" anchor="ctr"/>
+          <a:lstStyle/>
+          <a:p>
+            <a:pPr algn="ctr"/>
+          </a:p>
+        </p:txBody>
+      </p:sp>
+      <p:sp>
+        <p:nvSpPr>
+          <p:cNvPr id="7" name="TextBox 6"/>
           <p:cNvSpPr txBox="1"/>
           <p:nvPr/>
         </p:nvSpPr>
         <p:spPr>
           <a:xfrm>
-            <a:off x="731520" y="2148840"/>
-            <a:ext cx="10698480" cy="502920"/>
+            <a:off x="914400" y="2258568"/>
+            <a:ext cx="10332720" cy="1857756"/>
           </a:xfrm>
           <a:prstGeom prst="rect">
             <a:avLst/>
@@ -7279,41 +8014,112 @@
           </a:bodyPr>
           <a:lstStyle/>
           <a:p>
-            <a:pPr algn="l">
-              <a:lnSpc>
-                <a:spcPct val="115000"/>
-              </a:lnSpc>
-            </a:pPr>
-            <a:r>
-              <a:rPr sz="1600" b="1">
-                <a:solidFill>
-                  <a:srgbClr val="8AA6EF"/>
-                </a:solidFill>
-                <a:latin typeface="Georgia"/>
-              </a:rPr>
-              <a:t>Untuned.  </a:t>
-            </a:r>
-            <a:r>
-              <a:rPr sz="1600" b="0">
+            <a:pPr>
+              <a:lnSpc>
+                <a:spcPct val="125000"/>
+              </a:lnSpc>
+            </a:pPr>
+            <a:r>
+              <a:rPr sz="1400">
                 <a:solidFill>
                   <a:srgbClr val="E8ECF2"/>
                 </a:solidFill>
-                <a:latin typeface="Georgia"/>
-              </a:rPr>
-              <a:t>The grid parameters come from the author's cTrader Forex bot. They are not tuned for options, or for a one-week window.</a:t>
-            </a:r>
-          </a:p>
-        </p:txBody>
-      </p:sp>
-      <p:sp>
-        <p:nvSpPr>
-          <p:cNvPr id="7" name="TextBox 6"/>
+                <a:latin typeface="Consolas"/>
+              </a:rPr>
+              <a:t>SPY put grid, 2024-02..2026-08, one parameter changed:</a:t>
+            </a:r>
+          </a:p>
+          <a:p>
+            <a:pPr>
+              <a:lnSpc>
+                <a:spcPct val="125000"/>
+              </a:lnSpc>
+            </a:pPr>
+            <a:r>
+              <a:rPr sz="1400">
+                <a:solidFill>
+                  <a:srgbClr val="E8ECF2"/>
+                </a:solidFill>
+                <a:latin typeface="Consolas"/>
+              </a:rPr>
+              <a:t/>
+            </a:r>
+          </a:p>
+          <a:p>
+            <a:pPr>
+              <a:lnSpc>
+                <a:spcPct val="125000"/>
+              </a:lnSpc>
+            </a:pPr>
+            <a:r>
+              <a:rPr sz="1400">
+                <a:solidFill>
+                  <a:srgbClr val="E8ECF2"/>
+                </a:solidFill>
+                <a:latin typeface="Consolas"/>
+              </a:rPr>
+              <a:t>   cost per spread per execution      realized      drawdown</a:t>
+            </a:r>
+          </a:p>
+          <a:p>
+            <a:pPr>
+              <a:lnSpc>
+                <a:spcPct val="125000"/>
+              </a:lnSpc>
+            </a:pPr>
+            <a:r>
+              <a:rPr sz="1400">
+                <a:solidFill>
+                  <a:srgbClr val="E8ECF2"/>
+                </a:solidFill>
+                <a:latin typeface="Consolas"/>
+              </a:rPr>
+              <a:t>   0     &lt;- every published run       +2,850.00        -2,994</a:t>
+            </a:r>
+          </a:p>
+          <a:p>
+            <a:pPr>
+              <a:lnSpc>
+                <a:spcPct val="125000"/>
+              </a:lnSpc>
+            </a:pPr>
+            <a:r>
+              <a:rPr sz="1400">
+                <a:solidFill>
+                  <a:srgbClr val="E8ECF2"/>
+                </a:solidFill>
+                <a:latin typeface="Consolas"/>
+              </a:rPr>
+              <a:t>   17.00    median-based                -433.00        -3,716</a:t>
+            </a:r>
+          </a:p>
+          <a:p>
+            <a:pPr>
+              <a:lnSpc>
+                <a:spcPct val="125000"/>
+              </a:lnSpc>
+            </a:pPr>
+            <a:r>
+              <a:rPr sz="1400">
+                <a:solidFill>
+                  <a:srgbClr val="E8ECF2"/>
+                </a:solidFill>
+                <a:latin typeface="Consolas"/>
+              </a:rPr>
+              <a:t>   34.95    MEASURED on the live book -6,172.65        -7,024</a:t>
+            </a:r>
+          </a:p>
+        </p:txBody>
+      </p:sp>
+      <p:sp>
+        <p:nvSpPr>
+          <p:cNvPr id="8" name="TextBox 7"/>
           <p:cNvSpPr txBox="1"/>
           <p:nvPr/>
         </p:nvSpPr>
         <p:spPr>
           <a:xfrm>
-            <a:off x="731520" y="2953512"/>
+            <a:off x="731520" y="4160520"/>
             <a:ext cx="10698480" cy="502920"/>
           </a:xfrm>
           <a:prstGeom prst="rect">
@@ -7339,7 +8145,7 @@
                 </a:solidFill>
                 <a:latin typeface="Georgia"/>
               </a:rPr>
-              <a:t>An unmeasured tail.  </a:t>
+              <a:t>34.95 USD  </a:t>
             </a:r>
             <a:r>
               <a:rPr sz="1600" b="0">
@@ -7348,20 +8154,20 @@
                 </a:solidFill>
                 <a:latin typeface="Georgia"/>
               </a:rPr>
-              <a:t>Alpaca option data begins 2024-02 and holds no sustained bear market. The tail is bounded by construction — every position is a spread — but unmeasured.</a:t>
-            </a:r>
-          </a:p>
-        </p:txBody>
-      </p:sp>
-      <p:sp>
-        <p:nvSpPr>
-          <p:cNvPr id="8" name="TextBox 7"/>
+              <a:t>is half the bid/ask per spread, measured across 188 open legs. 69.89 round trip. Median quote width 4.9 % of mid.</a:t>
+            </a:r>
+          </a:p>
+        </p:txBody>
+      </p:sp>
+      <p:sp>
+        <p:nvSpPr>
+          <p:cNvPr id="9" name="TextBox 8"/>
           <p:cNvSpPr txBox="1"/>
           <p:nvPr/>
         </p:nvSpPr>
         <p:spPr>
           <a:xfrm>
-            <a:off x="731520" y="3758184"/>
+            <a:off x="731520" y="4818888"/>
             <a:ext cx="10698480" cy="502920"/>
           </a:xfrm>
           <a:prstGeom prst="rect">
@@ -7387,7 +8193,7 @@
                 </a:solidFill>
                 <a:latin typeface="Georgia"/>
               </a:rPr>
-              <a:t>A martingale, deliberately.  </a:t>
+              <a:t>The whole published profit  </a:t>
             </a:r>
             <a:r>
               <a:rPr sz="1600" b="0">
@@ -7396,20 +8202,20 @@
                 </a:solidFill>
                 <a:latin typeface="Georgia"/>
               </a:rPr>
-              <a:t>It adds into a losing position. That is the strategy, not a defect, and the drawdown on this page is what it looks like.</a:t>
-            </a:r>
-          </a:p>
-        </p:txBody>
-      </p:sp>
-      <p:sp>
-        <p:nvSpPr>
-          <p:cNvPr id="9" name="TextBox 8"/>
+              <a:t>was smaller than the cost that was never charged. cost_usd now has no default anywhere — every tool refuses to start without it.</a:t>
+            </a:r>
+          </a:p>
+        </p:txBody>
+      </p:sp>
+      <p:sp>
+        <p:nvSpPr>
+          <p:cNvPr id="10" name="TextBox 9"/>
           <p:cNvSpPr txBox="1"/>
           <p:nvPr/>
         </p:nvSpPr>
         <p:spPr>
           <a:xfrm>
-            <a:off x="731520" y="4562856"/>
+            <a:off x="731520" y="5477256"/>
             <a:ext cx="10698480" cy="502920"/>
           </a:xfrm>
           <a:prstGeom prst="rect">
@@ -7435,7 +8241,7 @@
                 </a:solidFill>
                 <a:latin typeface="Georgia"/>
               </a:rPr>
-              <a:t>The AI sizes only.  </a:t>
+              <a:t>And two fixes I proposed  </a:t>
             </a:r>
             <a:r>
               <a:rPr sz="1600" b="0">
@@ -7444,319 +8250,7 @@
                 </a:solidFill>
                 <a:latin typeface="Georgia"/>
               </a:rPr>
-              <a:t>Underlying choice and DTE/strike policy are still rules, not judgements.</a:t>
-            </a:r>
-          </a:p>
-        </p:txBody>
-      </p:sp>
-      <p:sp>
-        <p:nvSpPr>
-          <p:cNvPr id="10" name="TextBox 9"/>
-          <p:cNvSpPr txBox="1"/>
-          <p:nvPr/>
-        </p:nvSpPr>
-        <p:spPr>
-          <a:xfrm>
-            <a:off x="731520" y="5486400"/>
-            <a:ext cx="2674620" cy="274320"/>
-          </a:xfrm>
-          <a:prstGeom prst="rect">
-            <a:avLst/>
-          </a:prstGeom>
-          <a:noFill/>
-        </p:spPr>
-        <p:txBody>
-          <a:bodyPr wrap="square">
-            <a:spAutoFit/>
-          </a:bodyPr>
-          <a:lstStyle/>
-          <a:p>
-            <a:pPr algn="l">
-              <a:lnSpc>
-                <a:spcPct val="115000"/>
-              </a:lnSpc>
-            </a:pPr>
-            <a:r>
-              <a:rPr sz="1100" b="1">
-                <a:solidFill>
-                  <a:srgbClr val="8A94A5"/>
-                </a:solidFill>
-                <a:latin typeface="Consolas"/>
-              </a:rPr>
-              <a:t>EQUITY</a:t>
-            </a:r>
-          </a:p>
-        </p:txBody>
-      </p:sp>
-      <p:sp>
-        <p:nvSpPr>
-          <p:cNvPr id="11" name="TextBox 10"/>
-          <p:cNvSpPr txBox="1"/>
-          <p:nvPr/>
-        </p:nvSpPr>
-        <p:spPr>
-          <a:xfrm>
-            <a:off x="731520" y="5742432"/>
-            <a:ext cx="2674620" cy="548640"/>
-          </a:xfrm>
-          <a:prstGeom prst="rect">
-            <a:avLst/>
-          </a:prstGeom>
-          <a:noFill/>
-        </p:spPr>
-        <p:txBody>
-          <a:bodyPr wrap="square">
-            <a:spAutoFit/>
-          </a:bodyPr>
-          <a:lstStyle/>
-          <a:p>
-            <a:pPr algn="l">
-              <a:lnSpc>
-                <a:spcPct val="115000"/>
-              </a:lnSpc>
-            </a:pPr>
-            <a:r>
-              <a:rPr sz="2200" b="1">
-                <a:solidFill>
-                  <a:srgbClr val="E8ECF2"/>
-                </a:solidFill>
-                <a:latin typeface="Consolas"/>
-              </a:rPr>
-              <a:t>89,802</a:t>
-            </a:r>
-          </a:p>
-        </p:txBody>
-      </p:sp>
-      <p:sp>
-        <p:nvSpPr>
-          <p:cNvPr id="12" name="TextBox 11"/>
-          <p:cNvSpPr txBox="1"/>
-          <p:nvPr/>
-        </p:nvSpPr>
-        <p:spPr>
-          <a:xfrm>
-            <a:off x="3406139" y="5486400"/>
-            <a:ext cx="2674620" cy="274320"/>
-          </a:xfrm>
-          <a:prstGeom prst="rect">
-            <a:avLst/>
-          </a:prstGeom>
-          <a:noFill/>
-        </p:spPr>
-        <p:txBody>
-          <a:bodyPr wrap="square">
-            <a:spAutoFit/>
-          </a:bodyPr>
-          <a:lstStyle/>
-          <a:p>
-            <a:pPr algn="l">
-              <a:lnSpc>
-                <a:spcPct val="115000"/>
-              </a:lnSpc>
-            </a:pPr>
-            <a:r>
-              <a:rPr sz="1100" b="1">
-                <a:solidFill>
-                  <a:srgbClr val="8A94A5"/>
-                </a:solidFill>
-                <a:latin typeface="Consolas"/>
-              </a:rPr>
-              <a:t>P&amp;L</a:t>
-            </a:r>
-          </a:p>
-        </p:txBody>
-      </p:sp>
-      <p:sp>
-        <p:nvSpPr>
-          <p:cNvPr id="13" name="TextBox 12"/>
-          <p:cNvSpPr txBox="1"/>
-          <p:nvPr/>
-        </p:nvSpPr>
-        <p:spPr>
-          <a:xfrm>
-            <a:off x="3406139" y="5742432"/>
-            <a:ext cx="2674620" cy="548640"/>
-          </a:xfrm>
-          <a:prstGeom prst="rect">
-            <a:avLst/>
-          </a:prstGeom>
-          <a:noFill/>
-        </p:spPr>
-        <p:txBody>
-          <a:bodyPr wrap="square">
-            <a:spAutoFit/>
-          </a:bodyPr>
-          <a:lstStyle/>
-          <a:p>
-            <a:pPr algn="l">
-              <a:lnSpc>
-                <a:spcPct val="115000"/>
-              </a:lnSpc>
-            </a:pPr>
-            <a:r>
-              <a:rPr sz="2200" b="1">
-                <a:solidFill>
-                  <a:srgbClr val="E06A4E"/>
-                </a:solidFill>
-                <a:latin typeface="Consolas"/>
-              </a:rPr>
-              <a:t>-10,198  (-10.20 %)</a:t>
-            </a:r>
-          </a:p>
-        </p:txBody>
-      </p:sp>
-      <p:sp>
-        <p:nvSpPr>
-          <p:cNvPr id="14" name="TextBox 13"/>
-          <p:cNvSpPr txBox="1"/>
-          <p:nvPr/>
-        </p:nvSpPr>
-        <p:spPr>
-          <a:xfrm>
-            <a:off x="6080759" y="5486400"/>
-            <a:ext cx="2674620" cy="274320"/>
-          </a:xfrm>
-          <a:prstGeom prst="rect">
-            <a:avLst/>
-          </a:prstGeom>
-          <a:noFill/>
-        </p:spPr>
-        <p:txBody>
-          <a:bodyPr wrap="square">
-            <a:spAutoFit/>
-          </a:bodyPr>
-          <a:lstStyle/>
-          <a:p>
-            <a:pPr algn="l">
-              <a:lnSpc>
-                <a:spcPct val="115000"/>
-              </a:lnSpc>
-            </a:pPr>
-            <a:r>
-              <a:rPr sz="1100" b="1">
-                <a:solidFill>
-                  <a:srgbClr val="8A94A5"/>
-                </a:solidFill>
-                <a:latin typeface="Consolas"/>
-              </a:rPr>
-              <a:t>OPEN SPREADS</a:t>
-            </a:r>
-          </a:p>
-        </p:txBody>
-      </p:sp>
-      <p:sp>
-        <p:nvSpPr>
-          <p:cNvPr id="15" name="TextBox 14"/>
-          <p:cNvSpPr txBox="1"/>
-          <p:nvPr/>
-        </p:nvSpPr>
-        <p:spPr>
-          <a:xfrm>
-            <a:off x="6080759" y="5742432"/>
-            <a:ext cx="2674620" cy="548640"/>
-          </a:xfrm>
-          <a:prstGeom prst="rect">
-            <a:avLst/>
-          </a:prstGeom>
-          <a:noFill/>
-        </p:spPr>
-        <p:txBody>
-          <a:bodyPr wrap="square">
-            <a:spAutoFit/>
-          </a:bodyPr>
-          <a:lstStyle/>
-          <a:p>
-            <a:pPr algn="l">
-              <a:lnSpc>
-                <a:spcPct val="115000"/>
-              </a:lnSpc>
-            </a:pPr>
-            <a:r>
-              <a:rPr sz="2200" b="1">
-                <a:solidFill>
-                  <a:srgbClr val="E8ECF2"/>
-                </a:solidFill>
-                <a:latin typeface="Consolas"/>
-              </a:rPr>
-              <a:t>51</a:t>
-            </a:r>
-          </a:p>
-        </p:txBody>
-      </p:sp>
-      <p:sp>
-        <p:nvSpPr>
-          <p:cNvPr id="16" name="TextBox 15"/>
-          <p:cNvSpPr txBox="1"/>
-          <p:nvPr/>
-        </p:nvSpPr>
-        <p:spPr>
-          <a:xfrm>
-            <a:off x="8755380" y="5486400"/>
-            <a:ext cx="2674620" cy="274320"/>
-          </a:xfrm>
-          <a:prstGeom prst="rect">
-            <a:avLst/>
-          </a:prstGeom>
-          <a:noFill/>
-        </p:spPr>
-        <p:txBody>
-          <a:bodyPr wrap="square">
-            <a:spAutoFit/>
-          </a:bodyPr>
-          <a:lstStyle/>
-          <a:p>
-            <a:pPr algn="l">
-              <a:lnSpc>
-                <a:spcPct val="115000"/>
-              </a:lnSpc>
-            </a:pPr>
-            <a:r>
-              <a:rPr sz="1100" b="1">
-                <a:solidFill>
-                  <a:srgbClr val="8A94A5"/>
-                </a:solidFill>
-                <a:latin typeface="Consolas"/>
-              </a:rPr>
-              <a:t>RESIDUAL</a:t>
-            </a:r>
-          </a:p>
-        </p:txBody>
-      </p:sp>
-      <p:sp>
-        <p:nvSpPr>
-          <p:cNvPr id="17" name="TextBox 16"/>
-          <p:cNvSpPr txBox="1"/>
-          <p:nvPr/>
-        </p:nvSpPr>
-        <p:spPr>
-          <a:xfrm>
-            <a:off x="8755380" y="5742432"/>
-            <a:ext cx="2674620" cy="548640"/>
-          </a:xfrm>
-          <a:prstGeom prst="rect">
-            <a:avLst/>
-          </a:prstGeom>
-          <a:noFill/>
-        </p:spPr>
-        <p:txBody>
-          <a:bodyPr wrap="square">
-            <a:spAutoFit/>
-          </a:bodyPr>
-          <a:lstStyle/>
-          <a:p>
-            <a:pPr algn="l">
-              <a:lnSpc>
-                <a:spcPct val="115000"/>
-              </a:lnSpc>
-            </a:pPr>
-            <a:r>
-              <a:rPr sz="2200" b="1">
-                <a:solidFill>
-                  <a:srgbClr val="8AA6EF"/>
-                </a:solidFill>
-                <a:latin typeface="Consolas"/>
-              </a:rPr>
-              <a:t>+0.0000</a:t>
+              <a:t>were refuted by their own tests. Both are in the log, with the tables that killed them.</a:t>
             </a:r>
           </a:p>
         </p:txBody>

--- a/docs/deck.pptx
+++ b/docs/deck.pptx
@@ -6604,7 +6604,7 @@
                 </a:solidFill>
                 <a:latin typeface="Georgia"/>
               </a:rPr>
-              <a:t>`alpaca`, pinned to v0.0.13. Not an SDK, not raw HTTP. Positions, clock, quotes, chains, orders, fills, portfolio history, account activities.</a:t>
+              <a:t>the alpaca binary, pinned to v0.0.13. Not an SDK, not raw HTTP. Positions, clock, quotes, chains, orders, fills, portfolio history, account activities.</a:t>
             </a:r>
           </a:p>
         </p:txBody>

--- a/docs/deck.pptx
+++ b/docs/deck.pptx
@@ -16,6 +16,7 @@
     <p:sldId id="264" r:id="rId15"/>
     <p:sldId id="265" r:id="rId16"/>
     <p:sldId id="266" r:id="rId17"/>
+    <p:sldId id="267" r:id="rId18"/>
   </p:sldIdLst>
   <p:sldSz cx="12191695" cy="6858000" type="screen4x3"/>
   <p:notesSz cx="6858000" cy="9144000"/>
@@ -3415,7 +3416,7 @@
                 </a:solidFill>
                 <a:latin typeface="Consolas"/>
               </a:rPr>
-              <a:t>90,195</a:t>
+              <a:t>87,631</a:t>
             </a:r>
           </a:p>
         </p:txBody>
@@ -3493,7 +3494,7 @@
                 </a:solidFill>
                 <a:latin typeface="Consolas"/>
               </a:rPr>
-              <a:t>-9,805</a:t>
+              <a:t>-12,369</a:t>
             </a:r>
           </a:p>
         </p:txBody>
@@ -3571,7 +3572,7 @@
                 </a:solidFill>
                 <a:latin typeface="Consolas"/>
               </a:rPr>
-              <a:t>51</a:t>
+              <a:t>50</a:t>
             </a:r>
           </a:p>
         </p:txBody>
@@ -3649,7 +3650,7 @@
                 </a:solidFill>
                 <a:latin typeface="Consolas"/>
               </a:rPr>
-              <a:t>506</a:t>
+              <a:t>648</a:t>
             </a:r>
           </a:p>
         </p:txBody>
@@ -3736,7 +3737,7 @@
                 </a:solidFill>
                 <a:latin typeface="Consolas"/>
               </a:rPr>
-              <a:t>Alpaca AI Trading Agents Hackathon  ·  paper account PA3S85G7JUS0  ·  every figure read back through the Alpaca CLI  ·  as of 2026-09-01 16:06 ET</a:t>
+              <a:t>Alpaca AI Trading Agents Hackathon  ·  paper account PA3S85G7JUS0  ·  every figure read back through the Alpaca CLI  ·  as of 2026-09-03 07:35 ET</a:t>
             </a:r>
           </a:p>
         </p:txBody>
@@ -3837,7 +3838,7 @@
                 </a:solidFill>
                 <a:latin typeface="Consolas"/>
               </a:rPr>
-              <a:t>WHAT IS HONEST ABOUT THIS</a:t>
+              <a:t>WHAT THE MEASURING FOUND</a:t>
             </a:r>
           </a:p>
         </p:txBody>
@@ -3876,7 +3877,7 @@
                 </a:solidFill>
                 <a:latin typeface="Georgia"/>
               </a:rPr>
-              <a:t>The parts that are not finished</a:t>
+              <a:t>The backtest never paid the bid/ask</a:t>
             </a:r>
           </a:p>
         </p:txBody>
@@ -3927,14 +3928,60 @@
       </p:sp>
       <p:sp>
         <p:nvSpPr>
-          <p:cNvPr id="6" name="TextBox 5"/>
+          <p:cNvPr id="6" name="Rectangle 5"/>
+          <p:cNvSpPr/>
+          <p:nvPr/>
+        </p:nvSpPr>
+        <p:spPr>
+          <a:xfrm>
+            <a:off x="731520" y="2148840"/>
+            <a:ext cx="10698480" cy="1857756"/>
+          </a:xfrm>
+          <a:prstGeom prst="rect">
+            <a:avLst/>
+          </a:prstGeom>
+          <a:solidFill>
+            <a:srgbClr val="141922"/>
+          </a:solidFill>
+          <a:ln>
+            <a:solidFill>
+              <a:srgbClr val="242C38"/>
+            </a:solidFill>
+          </a:ln>
+          <a:effectLst/>
+        </p:spPr>
+        <p:style>
+          <a:lnRef idx="1">
+            <a:schemeClr val="accent1"/>
+          </a:lnRef>
+          <a:fillRef idx="3">
+            <a:schemeClr val="accent1"/>
+          </a:fillRef>
+          <a:effectRef idx="2">
+            <a:schemeClr val="accent1"/>
+          </a:effectRef>
+          <a:fontRef idx="minor">
+            <a:schemeClr val="lt1"/>
+          </a:fontRef>
+        </p:style>
+        <p:txBody>
+          <a:bodyPr rtlCol="0" anchor="ctr"/>
+          <a:lstStyle/>
+          <a:p>
+            <a:pPr algn="ctr"/>
+          </a:p>
+        </p:txBody>
+      </p:sp>
+      <p:sp>
+        <p:nvSpPr>
+          <p:cNvPr id="7" name="TextBox 6"/>
           <p:cNvSpPr txBox="1"/>
           <p:nvPr/>
         </p:nvSpPr>
         <p:spPr>
           <a:xfrm>
-            <a:off x="731520" y="2148840"/>
-            <a:ext cx="10698480" cy="502920"/>
+            <a:off x="914400" y="2258568"/>
+            <a:ext cx="10332720" cy="1857756"/>
           </a:xfrm>
           <a:prstGeom prst="rect">
             <a:avLst/>
@@ -3947,41 +3994,112 @@
           </a:bodyPr>
           <a:lstStyle/>
           <a:p>
-            <a:pPr algn="l">
-              <a:lnSpc>
-                <a:spcPct val="115000"/>
-              </a:lnSpc>
-            </a:pPr>
-            <a:r>
-              <a:rPr sz="1600" b="1">
-                <a:solidFill>
-                  <a:srgbClr val="8AA6EF"/>
-                </a:solidFill>
-                <a:latin typeface="Georgia"/>
-              </a:rPr>
-              <a:t>Untuned.  </a:t>
-            </a:r>
-            <a:r>
-              <a:rPr sz="1600" b="0">
+            <a:pPr>
+              <a:lnSpc>
+                <a:spcPct val="125000"/>
+              </a:lnSpc>
+            </a:pPr>
+            <a:r>
+              <a:rPr sz="1400">
                 <a:solidFill>
                   <a:srgbClr val="E8ECF2"/>
                 </a:solidFill>
-                <a:latin typeface="Georgia"/>
-              </a:rPr>
-              <a:t>The grid parameters come from the author's cTrader Forex bot. They are not tuned for options, or for a one-week window.</a:t>
-            </a:r>
-          </a:p>
-        </p:txBody>
-      </p:sp>
-      <p:sp>
-        <p:nvSpPr>
-          <p:cNvPr id="7" name="TextBox 6"/>
+                <a:latin typeface="Consolas"/>
+              </a:rPr>
+              <a:t>SPY put grid, 2024-02..2026-08, one parameter changed:</a:t>
+            </a:r>
+          </a:p>
+          <a:p>
+            <a:pPr>
+              <a:lnSpc>
+                <a:spcPct val="125000"/>
+              </a:lnSpc>
+            </a:pPr>
+            <a:r>
+              <a:rPr sz="1400">
+                <a:solidFill>
+                  <a:srgbClr val="E8ECF2"/>
+                </a:solidFill>
+                <a:latin typeface="Consolas"/>
+              </a:rPr>
+              <a:t/>
+            </a:r>
+          </a:p>
+          <a:p>
+            <a:pPr>
+              <a:lnSpc>
+                <a:spcPct val="125000"/>
+              </a:lnSpc>
+            </a:pPr>
+            <a:r>
+              <a:rPr sz="1400">
+                <a:solidFill>
+                  <a:srgbClr val="E8ECF2"/>
+                </a:solidFill>
+                <a:latin typeface="Consolas"/>
+              </a:rPr>
+              <a:t>   cost per spread per execution      realized      drawdown</a:t>
+            </a:r>
+          </a:p>
+          <a:p>
+            <a:pPr>
+              <a:lnSpc>
+                <a:spcPct val="125000"/>
+              </a:lnSpc>
+            </a:pPr>
+            <a:r>
+              <a:rPr sz="1400">
+                <a:solidFill>
+                  <a:srgbClr val="E8ECF2"/>
+                </a:solidFill>
+                <a:latin typeface="Consolas"/>
+              </a:rPr>
+              <a:t>   0     &lt;- every published run       +2,850.00        -2,994</a:t>
+            </a:r>
+          </a:p>
+          <a:p>
+            <a:pPr>
+              <a:lnSpc>
+                <a:spcPct val="125000"/>
+              </a:lnSpc>
+            </a:pPr>
+            <a:r>
+              <a:rPr sz="1400">
+                <a:solidFill>
+                  <a:srgbClr val="E8ECF2"/>
+                </a:solidFill>
+                <a:latin typeface="Consolas"/>
+              </a:rPr>
+              <a:t>   17.00    median-based                -433.00        -3,716</a:t>
+            </a:r>
+          </a:p>
+          <a:p>
+            <a:pPr>
+              <a:lnSpc>
+                <a:spcPct val="125000"/>
+              </a:lnSpc>
+            </a:pPr>
+            <a:r>
+              <a:rPr sz="1400">
+                <a:solidFill>
+                  <a:srgbClr val="E8ECF2"/>
+                </a:solidFill>
+                <a:latin typeface="Consolas"/>
+              </a:rPr>
+              <a:t>   34.95    MEASURED on the live book -6,172.65        -7,024</a:t>
+            </a:r>
+          </a:p>
+        </p:txBody>
+      </p:sp>
+      <p:sp>
+        <p:nvSpPr>
+          <p:cNvPr id="8" name="TextBox 7"/>
           <p:cNvSpPr txBox="1"/>
           <p:nvPr/>
         </p:nvSpPr>
         <p:spPr>
           <a:xfrm>
-            <a:off x="731520" y="2953512"/>
+            <a:off x="731520" y="4160520"/>
             <a:ext cx="10698480" cy="502920"/>
           </a:xfrm>
           <a:prstGeom prst="rect">
@@ -4007,7 +4125,7 @@
                 </a:solidFill>
                 <a:latin typeface="Georgia"/>
               </a:rPr>
-              <a:t>An unmeasured tail.  </a:t>
+              <a:t>34.95 USD  </a:t>
             </a:r>
             <a:r>
               <a:rPr sz="1600" b="0">
@@ -4016,20 +4134,20 @@
                 </a:solidFill>
                 <a:latin typeface="Georgia"/>
               </a:rPr>
-              <a:t>Alpaca option data begins 2024-02 and holds no sustained bear market. The tail is bounded by construction — every position is a spread — but unmeasured.</a:t>
-            </a:r>
-          </a:p>
-        </p:txBody>
-      </p:sp>
-      <p:sp>
-        <p:nvSpPr>
-          <p:cNvPr id="8" name="TextBox 7"/>
+              <a:t>is half the bid/ask per spread, measured across 188 open legs. 69.89 round trip. Median quote width 4.9 % of mid.</a:t>
+            </a:r>
+          </a:p>
+        </p:txBody>
+      </p:sp>
+      <p:sp>
+        <p:nvSpPr>
+          <p:cNvPr id="9" name="TextBox 8"/>
           <p:cNvSpPr txBox="1"/>
           <p:nvPr/>
         </p:nvSpPr>
         <p:spPr>
           <a:xfrm>
-            <a:off x="731520" y="3758184"/>
+            <a:off x="731520" y="4818888"/>
             <a:ext cx="10698480" cy="502920"/>
           </a:xfrm>
           <a:prstGeom prst="rect">
@@ -4055,7 +4173,7 @@
                 </a:solidFill>
                 <a:latin typeface="Georgia"/>
               </a:rPr>
-              <a:t>A martingale, deliberately.  </a:t>
+              <a:t>The whole published profit  </a:t>
             </a:r>
             <a:r>
               <a:rPr sz="1600" b="0">
@@ -4064,20 +4182,20 @@
                 </a:solidFill>
                 <a:latin typeface="Georgia"/>
               </a:rPr>
-              <a:t>It adds into a losing position. That is the strategy, not a defect, and the drawdown on this page is what it looks like.</a:t>
-            </a:r>
-          </a:p>
-        </p:txBody>
-      </p:sp>
-      <p:sp>
-        <p:nvSpPr>
-          <p:cNvPr id="9" name="TextBox 8"/>
+              <a:t>was smaller than the cost that was never charged. cost_usd now has no default anywhere — every tool refuses to start without it.</a:t>
+            </a:r>
+          </a:p>
+        </p:txBody>
+      </p:sp>
+      <p:sp>
+        <p:nvSpPr>
+          <p:cNvPr id="10" name="TextBox 9"/>
           <p:cNvSpPr txBox="1"/>
           <p:nvPr/>
         </p:nvSpPr>
         <p:spPr>
           <a:xfrm>
-            <a:off x="731520" y="4562856"/>
+            <a:off x="731520" y="5477256"/>
             <a:ext cx="10698480" cy="502920"/>
           </a:xfrm>
           <a:prstGeom prst="rect">
@@ -4103,7 +4221,7 @@
                 </a:solidFill>
                 <a:latin typeface="Georgia"/>
               </a:rPr>
-              <a:t>The AI sizes only.  </a:t>
+              <a:t>And two fixes I proposed  </a:t>
             </a:r>
             <a:r>
               <a:rPr sz="1600" b="0">
@@ -4112,319 +4230,7 @@
                 </a:solidFill>
                 <a:latin typeface="Georgia"/>
               </a:rPr>
-              <a:t>Underlying choice and DTE/strike policy are still rules, not judgements.</a:t>
-            </a:r>
-          </a:p>
-        </p:txBody>
-      </p:sp>
-      <p:sp>
-        <p:nvSpPr>
-          <p:cNvPr id="10" name="TextBox 9"/>
-          <p:cNvSpPr txBox="1"/>
-          <p:nvPr/>
-        </p:nvSpPr>
-        <p:spPr>
-          <a:xfrm>
-            <a:off x="731520" y="5486400"/>
-            <a:ext cx="2674620" cy="274320"/>
-          </a:xfrm>
-          <a:prstGeom prst="rect">
-            <a:avLst/>
-          </a:prstGeom>
-          <a:noFill/>
-        </p:spPr>
-        <p:txBody>
-          <a:bodyPr wrap="square">
-            <a:spAutoFit/>
-          </a:bodyPr>
-          <a:lstStyle/>
-          <a:p>
-            <a:pPr algn="l">
-              <a:lnSpc>
-                <a:spcPct val="115000"/>
-              </a:lnSpc>
-            </a:pPr>
-            <a:r>
-              <a:rPr sz="1100" b="1">
-                <a:solidFill>
-                  <a:srgbClr val="8A94A5"/>
-                </a:solidFill>
-                <a:latin typeface="Consolas"/>
-              </a:rPr>
-              <a:t>EQUITY</a:t>
-            </a:r>
-          </a:p>
-        </p:txBody>
-      </p:sp>
-      <p:sp>
-        <p:nvSpPr>
-          <p:cNvPr id="11" name="TextBox 10"/>
-          <p:cNvSpPr txBox="1"/>
-          <p:nvPr/>
-        </p:nvSpPr>
-        <p:spPr>
-          <a:xfrm>
-            <a:off x="731520" y="5742432"/>
-            <a:ext cx="2674620" cy="548640"/>
-          </a:xfrm>
-          <a:prstGeom prst="rect">
-            <a:avLst/>
-          </a:prstGeom>
-          <a:noFill/>
-        </p:spPr>
-        <p:txBody>
-          <a:bodyPr wrap="square">
-            <a:spAutoFit/>
-          </a:bodyPr>
-          <a:lstStyle/>
-          <a:p>
-            <a:pPr algn="l">
-              <a:lnSpc>
-                <a:spcPct val="115000"/>
-              </a:lnSpc>
-            </a:pPr>
-            <a:r>
-              <a:rPr sz="2200" b="1">
-                <a:solidFill>
-                  <a:srgbClr val="E8ECF2"/>
-                </a:solidFill>
-                <a:latin typeface="Consolas"/>
-              </a:rPr>
-              <a:t>90,195</a:t>
-            </a:r>
-          </a:p>
-        </p:txBody>
-      </p:sp>
-      <p:sp>
-        <p:nvSpPr>
-          <p:cNvPr id="12" name="TextBox 11"/>
-          <p:cNvSpPr txBox="1"/>
-          <p:nvPr/>
-        </p:nvSpPr>
-        <p:spPr>
-          <a:xfrm>
-            <a:off x="3406139" y="5486400"/>
-            <a:ext cx="2674620" cy="274320"/>
-          </a:xfrm>
-          <a:prstGeom prst="rect">
-            <a:avLst/>
-          </a:prstGeom>
-          <a:noFill/>
-        </p:spPr>
-        <p:txBody>
-          <a:bodyPr wrap="square">
-            <a:spAutoFit/>
-          </a:bodyPr>
-          <a:lstStyle/>
-          <a:p>
-            <a:pPr algn="l">
-              <a:lnSpc>
-                <a:spcPct val="115000"/>
-              </a:lnSpc>
-            </a:pPr>
-            <a:r>
-              <a:rPr sz="1100" b="1">
-                <a:solidFill>
-                  <a:srgbClr val="8A94A5"/>
-                </a:solidFill>
-                <a:latin typeface="Consolas"/>
-              </a:rPr>
-              <a:t>P&amp;L</a:t>
-            </a:r>
-          </a:p>
-        </p:txBody>
-      </p:sp>
-      <p:sp>
-        <p:nvSpPr>
-          <p:cNvPr id="13" name="TextBox 12"/>
-          <p:cNvSpPr txBox="1"/>
-          <p:nvPr/>
-        </p:nvSpPr>
-        <p:spPr>
-          <a:xfrm>
-            <a:off x="3406139" y="5742432"/>
-            <a:ext cx="2674620" cy="548640"/>
-          </a:xfrm>
-          <a:prstGeom prst="rect">
-            <a:avLst/>
-          </a:prstGeom>
-          <a:noFill/>
-        </p:spPr>
-        <p:txBody>
-          <a:bodyPr wrap="square">
-            <a:spAutoFit/>
-          </a:bodyPr>
-          <a:lstStyle/>
-          <a:p>
-            <a:pPr algn="l">
-              <a:lnSpc>
-                <a:spcPct val="115000"/>
-              </a:lnSpc>
-            </a:pPr>
-            <a:r>
-              <a:rPr sz="2200" b="1">
-                <a:solidFill>
-                  <a:srgbClr val="E06A4E"/>
-                </a:solidFill>
-                <a:latin typeface="Consolas"/>
-              </a:rPr>
-              <a:t>-9,805  (-9.81 %)</a:t>
-            </a:r>
-          </a:p>
-        </p:txBody>
-      </p:sp>
-      <p:sp>
-        <p:nvSpPr>
-          <p:cNvPr id="14" name="TextBox 13"/>
-          <p:cNvSpPr txBox="1"/>
-          <p:nvPr/>
-        </p:nvSpPr>
-        <p:spPr>
-          <a:xfrm>
-            <a:off x="6080759" y="5486400"/>
-            <a:ext cx="2674620" cy="274320"/>
-          </a:xfrm>
-          <a:prstGeom prst="rect">
-            <a:avLst/>
-          </a:prstGeom>
-          <a:noFill/>
-        </p:spPr>
-        <p:txBody>
-          <a:bodyPr wrap="square">
-            <a:spAutoFit/>
-          </a:bodyPr>
-          <a:lstStyle/>
-          <a:p>
-            <a:pPr algn="l">
-              <a:lnSpc>
-                <a:spcPct val="115000"/>
-              </a:lnSpc>
-            </a:pPr>
-            <a:r>
-              <a:rPr sz="1100" b="1">
-                <a:solidFill>
-                  <a:srgbClr val="8A94A5"/>
-                </a:solidFill>
-                <a:latin typeface="Consolas"/>
-              </a:rPr>
-              <a:t>OPEN SPREADS</a:t>
-            </a:r>
-          </a:p>
-        </p:txBody>
-      </p:sp>
-      <p:sp>
-        <p:nvSpPr>
-          <p:cNvPr id="15" name="TextBox 14"/>
-          <p:cNvSpPr txBox="1"/>
-          <p:nvPr/>
-        </p:nvSpPr>
-        <p:spPr>
-          <a:xfrm>
-            <a:off x="6080759" y="5742432"/>
-            <a:ext cx="2674620" cy="548640"/>
-          </a:xfrm>
-          <a:prstGeom prst="rect">
-            <a:avLst/>
-          </a:prstGeom>
-          <a:noFill/>
-        </p:spPr>
-        <p:txBody>
-          <a:bodyPr wrap="square">
-            <a:spAutoFit/>
-          </a:bodyPr>
-          <a:lstStyle/>
-          <a:p>
-            <a:pPr algn="l">
-              <a:lnSpc>
-                <a:spcPct val="115000"/>
-              </a:lnSpc>
-            </a:pPr>
-            <a:r>
-              <a:rPr sz="2200" b="1">
-                <a:solidFill>
-                  <a:srgbClr val="E8ECF2"/>
-                </a:solidFill>
-                <a:latin typeface="Consolas"/>
-              </a:rPr>
-              <a:t>51</a:t>
-            </a:r>
-          </a:p>
-        </p:txBody>
-      </p:sp>
-      <p:sp>
-        <p:nvSpPr>
-          <p:cNvPr id="16" name="TextBox 15"/>
-          <p:cNvSpPr txBox="1"/>
-          <p:nvPr/>
-        </p:nvSpPr>
-        <p:spPr>
-          <a:xfrm>
-            <a:off x="8755380" y="5486400"/>
-            <a:ext cx="2674620" cy="274320"/>
-          </a:xfrm>
-          <a:prstGeom prst="rect">
-            <a:avLst/>
-          </a:prstGeom>
-          <a:noFill/>
-        </p:spPr>
-        <p:txBody>
-          <a:bodyPr wrap="square">
-            <a:spAutoFit/>
-          </a:bodyPr>
-          <a:lstStyle/>
-          <a:p>
-            <a:pPr algn="l">
-              <a:lnSpc>
-                <a:spcPct val="115000"/>
-              </a:lnSpc>
-            </a:pPr>
-            <a:r>
-              <a:rPr sz="1100" b="1">
-                <a:solidFill>
-                  <a:srgbClr val="8A94A5"/>
-                </a:solidFill>
-                <a:latin typeface="Consolas"/>
-              </a:rPr>
-              <a:t>RESIDUAL</a:t>
-            </a:r>
-          </a:p>
-        </p:txBody>
-      </p:sp>
-      <p:sp>
-        <p:nvSpPr>
-          <p:cNvPr id="17" name="TextBox 16"/>
-          <p:cNvSpPr txBox="1"/>
-          <p:nvPr/>
-        </p:nvSpPr>
-        <p:spPr>
-          <a:xfrm>
-            <a:off x="8755380" y="5742432"/>
-            <a:ext cx="2674620" cy="548640"/>
-          </a:xfrm>
-          <a:prstGeom prst="rect">
-            <a:avLst/>
-          </a:prstGeom>
-          <a:noFill/>
-        </p:spPr>
-        <p:txBody>
-          <a:bodyPr wrap="square">
-            <a:spAutoFit/>
-          </a:bodyPr>
-          <a:lstStyle/>
-          <a:p>
-            <a:pPr algn="l">
-              <a:lnSpc>
-                <a:spcPct val="115000"/>
-              </a:lnSpc>
-            </a:pPr>
-            <a:r>
-              <a:rPr sz="2200" b="1">
-                <a:solidFill>
-                  <a:srgbClr val="8AA6EF"/>
-                </a:solidFill>
-                <a:latin typeface="Consolas"/>
-              </a:rPr>
-              <a:t>+0.0000</a:t>
+              <a:t>were refuted by their own tests. Both are in the log, with the tables that killed them.</a:t>
             </a:r>
           </a:p>
         </p:txBody>
@@ -4491,6 +4297,694 @@
           </a:p>
         </p:txBody>
       </p:sp>
+      <p:sp>
+        <p:nvSpPr>
+          <p:cNvPr id="3" name="TextBox 2"/>
+          <p:cNvSpPr txBox="1"/>
+          <p:nvPr/>
+        </p:nvSpPr>
+        <p:spPr>
+          <a:xfrm>
+            <a:off x="731520" y="502920"/>
+            <a:ext cx="10698480" cy="365760"/>
+          </a:xfrm>
+          <a:prstGeom prst="rect">
+            <a:avLst/>
+          </a:prstGeom>
+          <a:noFill/>
+        </p:spPr>
+        <p:txBody>
+          <a:bodyPr wrap="square">
+            <a:spAutoFit/>
+          </a:bodyPr>
+          <a:lstStyle/>
+          <a:p>
+            <a:pPr algn="l">
+              <a:lnSpc>
+                <a:spcPct val="115000"/>
+              </a:lnSpc>
+            </a:pPr>
+            <a:r>
+              <a:rPr sz="1300" b="1">
+                <a:solidFill>
+                  <a:srgbClr val="8A94A5"/>
+                </a:solidFill>
+                <a:latin typeface="Consolas"/>
+              </a:rPr>
+              <a:t>WHAT IS HONEST ABOUT THIS</a:t>
+            </a:r>
+          </a:p>
+        </p:txBody>
+      </p:sp>
+      <p:sp>
+        <p:nvSpPr>
+          <p:cNvPr id="4" name="TextBox 3"/>
+          <p:cNvSpPr txBox="1"/>
+          <p:nvPr/>
+        </p:nvSpPr>
+        <p:spPr>
+          <a:xfrm>
+            <a:off x="731520" y="868680"/>
+            <a:ext cx="10698480" cy="914400"/>
+          </a:xfrm>
+          <a:prstGeom prst="rect">
+            <a:avLst/>
+          </a:prstGeom>
+          <a:noFill/>
+        </p:spPr>
+        <p:txBody>
+          <a:bodyPr wrap="square">
+            <a:spAutoFit/>
+          </a:bodyPr>
+          <a:lstStyle/>
+          <a:p>
+            <a:pPr algn="l">
+              <a:lnSpc>
+                <a:spcPct val="105000"/>
+              </a:lnSpc>
+            </a:pPr>
+            <a:r>
+              <a:rPr sz="3000" b="1">
+                <a:solidFill>
+                  <a:srgbClr val="E8ECF2"/>
+                </a:solidFill>
+                <a:latin typeface="Georgia"/>
+              </a:rPr>
+              <a:t>The parts that are not finished</a:t>
+            </a:r>
+          </a:p>
+        </p:txBody>
+      </p:sp>
+      <p:sp>
+        <p:nvSpPr>
+          <p:cNvPr id="5" name="Rectangle 4"/>
+          <p:cNvSpPr/>
+          <p:nvPr/>
+        </p:nvSpPr>
+        <p:spPr>
+          <a:xfrm>
+            <a:off x="731520" y="1783080"/>
+            <a:ext cx="10698480" cy="9525"/>
+          </a:xfrm>
+          <a:prstGeom prst="rect">
+            <a:avLst/>
+          </a:prstGeom>
+          <a:solidFill>
+            <a:srgbClr val="242C38"/>
+          </a:solidFill>
+          <a:ln>
+            <a:noFill/>
+          </a:ln>
+          <a:effectLst/>
+        </p:spPr>
+        <p:style>
+          <a:lnRef idx="1">
+            <a:schemeClr val="accent1"/>
+          </a:lnRef>
+          <a:fillRef idx="3">
+            <a:schemeClr val="accent1"/>
+          </a:fillRef>
+          <a:effectRef idx="2">
+            <a:schemeClr val="accent1"/>
+          </a:effectRef>
+          <a:fontRef idx="minor">
+            <a:schemeClr val="lt1"/>
+          </a:fontRef>
+        </p:style>
+        <p:txBody>
+          <a:bodyPr rtlCol="0" anchor="ctr"/>
+          <a:lstStyle/>
+          <a:p>
+            <a:pPr algn="ctr"/>
+          </a:p>
+        </p:txBody>
+      </p:sp>
+      <p:sp>
+        <p:nvSpPr>
+          <p:cNvPr id="6" name="TextBox 5"/>
+          <p:cNvSpPr txBox="1"/>
+          <p:nvPr/>
+        </p:nvSpPr>
+        <p:spPr>
+          <a:xfrm>
+            <a:off x="731520" y="2148840"/>
+            <a:ext cx="10698480" cy="502920"/>
+          </a:xfrm>
+          <a:prstGeom prst="rect">
+            <a:avLst/>
+          </a:prstGeom>
+          <a:noFill/>
+        </p:spPr>
+        <p:txBody>
+          <a:bodyPr wrap="square">
+            <a:spAutoFit/>
+          </a:bodyPr>
+          <a:lstStyle/>
+          <a:p>
+            <a:pPr algn="l">
+              <a:lnSpc>
+                <a:spcPct val="115000"/>
+              </a:lnSpc>
+            </a:pPr>
+            <a:r>
+              <a:rPr sz="1600" b="1">
+                <a:solidFill>
+                  <a:srgbClr val="8AA6EF"/>
+                </a:solidFill>
+                <a:latin typeface="Georgia"/>
+              </a:rPr>
+              <a:t>Untuned.  </a:t>
+            </a:r>
+            <a:r>
+              <a:rPr sz="1600" b="0">
+                <a:solidFill>
+                  <a:srgbClr val="E8ECF2"/>
+                </a:solidFill>
+                <a:latin typeface="Georgia"/>
+              </a:rPr>
+              <a:t>The grid parameters come from the author's cTrader Forex bot. They are not tuned for options, or for a one-week window.</a:t>
+            </a:r>
+          </a:p>
+        </p:txBody>
+      </p:sp>
+      <p:sp>
+        <p:nvSpPr>
+          <p:cNvPr id="7" name="TextBox 6"/>
+          <p:cNvSpPr txBox="1"/>
+          <p:nvPr/>
+        </p:nvSpPr>
+        <p:spPr>
+          <a:xfrm>
+            <a:off x="731520" y="2953512"/>
+            <a:ext cx="10698480" cy="502920"/>
+          </a:xfrm>
+          <a:prstGeom prst="rect">
+            <a:avLst/>
+          </a:prstGeom>
+          <a:noFill/>
+        </p:spPr>
+        <p:txBody>
+          <a:bodyPr wrap="square">
+            <a:spAutoFit/>
+          </a:bodyPr>
+          <a:lstStyle/>
+          <a:p>
+            <a:pPr algn="l">
+              <a:lnSpc>
+                <a:spcPct val="115000"/>
+              </a:lnSpc>
+            </a:pPr>
+            <a:r>
+              <a:rPr sz="1600" b="1">
+                <a:solidFill>
+                  <a:srgbClr val="8AA6EF"/>
+                </a:solidFill>
+                <a:latin typeface="Georgia"/>
+              </a:rPr>
+              <a:t>An unmeasured tail.  </a:t>
+            </a:r>
+            <a:r>
+              <a:rPr sz="1600" b="0">
+                <a:solidFill>
+                  <a:srgbClr val="E8ECF2"/>
+                </a:solidFill>
+                <a:latin typeface="Georgia"/>
+              </a:rPr>
+              <a:t>Alpaca option data begins 2024-02 and holds no sustained bear market. The tail is bounded by construction — every position is a spread — but unmeasured.</a:t>
+            </a:r>
+          </a:p>
+        </p:txBody>
+      </p:sp>
+      <p:sp>
+        <p:nvSpPr>
+          <p:cNvPr id="8" name="TextBox 7"/>
+          <p:cNvSpPr txBox="1"/>
+          <p:nvPr/>
+        </p:nvSpPr>
+        <p:spPr>
+          <a:xfrm>
+            <a:off x="731520" y="3758184"/>
+            <a:ext cx="10698480" cy="502920"/>
+          </a:xfrm>
+          <a:prstGeom prst="rect">
+            <a:avLst/>
+          </a:prstGeom>
+          <a:noFill/>
+        </p:spPr>
+        <p:txBody>
+          <a:bodyPr wrap="square">
+            <a:spAutoFit/>
+          </a:bodyPr>
+          <a:lstStyle/>
+          <a:p>
+            <a:pPr algn="l">
+              <a:lnSpc>
+                <a:spcPct val="115000"/>
+              </a:lnSpc>
+            </a:pPr>
+            <a:r>
+              <a:rPr sz="1600" b="1">
+                <a:solidFill>
+                  <a:srgbClr val="8AA6EF"/>
+                </a:solidFill>
+                <a:latin typeface="Georgia"/>
+              </a:rPr>
+              <a:t>A martingale, deliberately.  </a:t>
+            </a:r>
+            <a:r>
+              <a:rPr sz="1600" b="0">
+                <a:solidFill>
+                  <a:srgbClr val="E8ECF2"/>
+                </a:solidFill>
+                <a:latin typeface="Georgia"/>
+              </a:rPr>
+              <a:t>It adds into a losing position. That is the strategy, not a defect, and the drawdown on this page is what it looks like.</a:t>
+            </a:r>
+          </a:p>
+        </p:txBody>
+      </p:sp>
+      <p:sp>
+        <p:nvSpPr>
+          <p:cNvPr id="9" name="TextBox 8"/>
+          <p:cNvSpPr txBox="1"/>
+          <p:nvPr/>
+        </p:nvSpPr>
+        <p:spPr>
+          <a:xfrm>
+            <a:off x="731520" y="4562856"/>
+            <a:ext cx="10698480" cy="502920"/>
+          </a:xfrm>
+          <a:prstGeom prst="rect">
+            <a:avLst/>
+          </a:prstGeom>
+          <a:noFill/>
+        </p:spPr>
+        <p:txBody>
+          <a:bodyPr wrap="square">
+            <a:spAutoFit/>
+          </a:bodyPr>
+          <a:lstStyle/>
+          <a:p>
+            <a:pPr algn="l">
+              <a:lnSpc>
+                <a:spcPct val="115000"/>
+              </a:lnSpc>
+            </a:pPr>
+            <a:r>
+              <a:rPr sz="1600" b="1">
+                <a:solidFill>
+                  <a:srgbClr val="8AA6EF"/>
+                </a:solidFill>
+                <a:latin typeface="Georgia"/>
+              </a:rPr>
+              <a:t>The AI sizes only.  </a:t>
+            </a:r>
+            <a:r>
+              <a:rPr sz="1600" b="0">
+                <a:solidFill>
+                  <a:srgbClr val="E8ECF2"/>
+                </a:solidFill>
+                <a:latin typeface="Georgia"/>
+              </a:rPr>
+              <a:t>Underlying choice and DTE/strike policy are still rules, not judgements.</a:t>
+            </a:r>
+          </a:p>
+        </p:txBody>
+      </p:sp>
+      <p:sp>
+        <p:nvSpPr>
+          <p:cNvPr id="10" name="TextBox 9"/>
+          <p:cNvSpPr txBox="1"/>
+          <p:nvPr/>
+        </p:nvSpPr>
+        <p:spPr>
+          <a:xfrm>
+            <a:off x="731520" y="5486400"/>
+            <a:ext cx="2674620" cy="274320"/>
+          </a:xfrm>
+          <a:prstGeom prst="rect">
+            <a:avLst/>
+          </a:prstGeom>
+          <a:noFill/>
+        </p:spPr>
+        <p:txBody>
+          <a:bodyPr wrap="square">
+            <a:spAutoFit/>
+          </a:bodyPr>
+          <a:lstStyle/>
+          <a:p>
+            <a:pPr algn="l">
+              <a:lnSpc>
+                <a:spcPct val="115000"/>
+              </a:lnSpc>
+            </a:pPr>
+            <a:r>
+              <a:rPr sz="1100" b="1">
+                <a:solidFill>
+                  <a:srgbClr val="8A94A5"/>
+                </a:solidFill>
+                <a:latin typeface="Consolas"/>
+              </a:rPr>
+              <a:t>EQUITY</a:t>
+            </a:r>
+          </a:p>
+        </p:txBody>
+      </p:sp>
+      <p:sp>
+        <p:nvSpPr>
+          <p:cNvPr id="11" name="TextBox 10"/>
+          <p:cNvSpPr txBox="1"/>
+          <p:nvPr/>
+        </p:nvSpPr>
+        <p:spPr>
+          <a:xfrm>
+            <a:off x="731520" y="5742432"/>
+            <a:ext cx="2674620" cy="548640"/>
+          </a:xfrm>
+          <a:prstGeom prst="rect">
+            <a:avLst/>
+          </a:prstGeom>
+          <a:noFill/>
+        </p:spPr>
+        <p:txBody>
+          <a:bodyPr wrap="square">
+            <a:spAutoFit/>
+          </a:bodyPr>
+          <a:lstStyle/>
+          <a:p>
+            <a:pPr algn="l">
+              <a:lnSpc>
+                <a:spcPct val="115000"/>
+              </a:lnSpc>
+            </a:pPr>
+            <a:r>
+              <a:rPr sz="2200" b="1">
+                <a:solidFill>
+                  <a:srgbClr val="E8ECF2"/>
+                </a:solidFill>
+                <a:latin typeface="Consolas"/>
+              </a:rPr>
+              <a:t>87,631</a:t>
+            </a:r>
+          </a:p>
+        </p:txBody>
+      </p:sp>
+      <p:sp>
+        <p:nvSpPr>
+          <p:cNvPr id="12" name="TextBox 11"/>
+          <p:cNvSpPr txBox="1"/>
+          <p:nvPr/>
+        </p:nvSpPr>
+        <p:spPr>
+          <a:xfrm>
+            <a:off x="3406139" y="5486400"/>
+            <a:ext cx="2674620" cy="274320"/>
+          </a:xfrm>
+          <a:prstGeom prst="rect">
+            <a:avLst/>
+          </a:prstGeom>
+          <a:noFill/>
+        </p:spPr>
+        <p:txBody>
+          <a:bodyPr wrap="square">
+            <a:spAutoFit/>
+          </a:bodyPr>
+          <a:lstStyle/>
+          <a:p>
+            <a:pPr algn="l">
+              <a:lnSpc>
+                <a:spcPct val="115000"/>
+              </a:lnSpc>
+            </a:pPr>
+            <a:r>
+              <a:rPr sz="1100" b="1">
+                <a:solidFill>
+                  <a:srgbClr val="8A94A5"/>
+                </a:solidFill>
+                <a:latin typeface="Consolas"/>
+              </a:rPr>
+              <a:t>P&amp;L</a:t>
+            </a:r>
+          </a:p>
+        </p:txBody>
+      </p:sp>
+      <p:sp>
+        <p:nvSpPr>
+          <p:cNvPr id="13" name="TextBox 12"/>
+          <p:cNvSpPr txBox="1"/>
+          <p:nvPr/>
+        </p:nvSpPr>
+        <p:spPr>
+          <a:xfrm>
+            <a:off x="3406139" y="5742432"/>
+            <a:ext cx="2674620" cy="548640"/>
+          </a:xfrm>
+          <a:prstGeom prst="rect">
+            <a:avLst/>
+          </a:prstGeom>
+          <a:noFill/>
+        </p:spPr>
+        <p:txBody>
+          <a:bodyPr wrap="square">
+            <a:spAutoFit/>
+          </a:bodyPr>
+          <a:lstStyle/>
+          <a:p>
+            <a:pPr algn="l">
+              <a:lnSpc>
+                <a:spcPct val="115000"/>
+              </a:lnSpc>
+            </a:pPr>
+            <a:r>
+              <a:rPr sz="2200" b="1">
+                <a:solidFill>
+                  <a:srgbClr val="E06A4E"/>
+                </a:solidFill>
+                <a:latin typeface="Consolas"/>
+              </a:rPr>
+              <a:t>-12,369  (-12.37 %)</a:t>
+            </a:r>
+          </a:p>
+        </p:txBody>
+      </p:sp>
+      <p:sp>
+        <p:nvSpPr>
+          <p:cNvPr id="14" name="TextBox 13"/>
+          <p:cNvSpPr txBox="1"/>
+          <p:nvPr/>
+        </p:nvSpPr>
+        <p:spPr>
+          <a:xfrm>
+            <a:off x="6080759" y="5486400"/>
+            <a:ext cx="2674620" cy="274320"/>
+          </a:xfrm>
+          <a:prstGeom prst="rect">
+            <a:avLst/>
+          </a:prstGeom>
+          <a:noFill/>
+        </p:spPr>
+        <p:txBody>
+          <a:bodyPr wrap="square">
+            <a:spAutoFit/>
+          </a:bodyPr>
+          <a:lstStyle/>
+          <a:p>
+            <a:pPr algn="l">
+              <a:lnSpc>
+                <a:spcPct val="115000"/>
+              </a:lnSpc>
+            </a:pPr>
+            <a:r>
+              <a:rPr sz="1100" b="1">
+                <a:solidFill>
+                  <a:srgbClr val="8A94A5"/>
+                </a:solidFill>
+                <a:latin typeface="Consolas"/>
+              </a:rPr>
+              <a:t>OPEN SPREADS</a:t>
+            </a:r>
+          </a:p>
+        </p:txBody>
+      </p:sp>
+      <p:sp>
+        <p:nvSpPr>
+          <p:cNvPr id="15" name="TextBox 14"/>
+          <p:cNvSpPr txBox="1"/>
+          <p:nvPr/>
+        </p:nvSpPr>
+        <p:spPr>
+          <a:xfrm>
+            <a:off x="6080759" y="5742432"/>
+            <a:ext cx="2674620" cy="548640"/>
+          </a:xfrm>
+          <a:prstGeom prst="rect">
+            <a:avLst/>
+          </a:prstGeom>
+          <a:noFill/>
+        </p:spPr>
+        <p:txBody>
+          <a:bodyPr wrap="square">
+            <a:spAutoFit/>
+          </a:bodyPr>
+          <a:lstStyle/>
+          <a:p>
+            <a:pPr algn="l">
+              <a:lnSpc>
+                <a:spcPct val="115000"/>
+              </a:lnSpc>
+            </a:pPr>
+            <a:r>
+              <a:rPr sz="2200" b="1">
+                <a:solidFill>
+                  <a:srgbClr val="E8ECF2"/>
+                </a:solidFill>
+                <a:latin typeface="Consolas"/>
+              </a:rPr>
+              <a:t>50</a:t>
+            </a:r>
+          </a:p>
+        </p:txBody>
+      </p:sp>
+      <p:sp>
+        <p:nvSpPr>
+          <p:cNvPr id="16" name="TextBox 15"/>
+          <p:cNvSpPr txBox="1"/>
+          <p:nvPr/>
+        </p:nvSpPr>
+        <p:spPr>
+          <a:xfrm>
+            <a:off x="8755380" y="5486400"/>
+            <a:ext cx="2674620" cy="274320"/>
+          </a:xfrm>
+          <a:prstGeom prst="rect">
+            <a:avLst/>
+          </a:prstGeom>
+          <a:noFill/>
+        </p:spPr>
+        <p:txBody>
+          <a:bodyPr wrap="square">
+            <a:spAutoFit/>
+          </a:bodyPr>
+          <a:lstStyle/>
+          <a:p>
+            <a:pPr algn="l">
+              <a:lnSpc>
+                <a:spcPct val="115000"/>
+              </a:lnSpc>
+            </a:pPr>
+            <a:r>
+              <a:rPr sz="1100" b="1">
+                <a:solidFill>
+                  <a:srgbClr val="8A94A5"/>
+                </a:solidFill>
+                <a:latin typeface="Consolas"/>
+              </a:rPr>
+              <a:t>RESIDUAL</a:t>
+            </a:r>
+          </a:p>
+        </p:txBody>
+      </p:sp>
+      <p:sp>
+        <p:nvSpPr>
+          <p:cNvPr id="17" name="TextBox 16"/>
+          <p:cNvSpPr txBox="1"/>
+          <p:nvPr/>
+        </p:nvSpPr>
+        <p:spPr>
+          <a:xfrm>
+            <a:off x="8755380" y="5742432"/>
+            <a:ext cx="2674620" cy="548640"/>
+          </a:xfrm>
+          <a:prstGeom prst="rect">
+            <a:avLst/>
+          </a:prstGeom>
+          <a:noFill/>
+        </p:spPr>
+        <p:txBody>
+          <a:bodyPr wrap="square">
+            <a:spAutoFit/>
+          </a:bodyPr>
+          <a:lstStyle/>
+          <a:p>
+            <a:pPr algn="l">
+              <a:lnSpc>
+                <a:spcPct val="115000"/>
+              </a:lnSpc>
+            </a:pPr>
+            <a:r>
+              <a:rPr sz="2200" b="1">
+                <a:solidFill>
+                  <a:srgbClr val="8AA6EF"/>
+                </a:solidFill>
+                <a:latin typeface="Consolas"/>
+              </a:rPr>
+              <a:t>+0.0000</a:t>
+            </a:r>
+          </a:p>
+        </p:txBody>
+      </p:sp>
+    </p:spTree>
+  </p:cSld>
+  <p:clrMapOvr>
+    <a:masterClrMapping/>
+  </p:clrMapOvr>
+</p:sld>
+</file>
+
+<file path=ppt/slides/slide12.xml><?xml version="1.0" encoding="utf-8"?>
+<p:sld xmlns:a="http://schemas.openxmlformats.org/drawingml/2006/main" xmlns:p="http://schemas.openxmlformats.org/presentationml/2006/main" xmlns:r="http://schemas.openxmlformats.org/officeDocument/2006/relationships">
+  <p:cSld>
+    <p:spTree>
+      <p:nvGrpSpPr>
+        <p:cNvPr id="1" name=""/>
+        <p:cNvGrpSpPr/>
+        <p:nvPr/>
+      </p:nvGrpSpPr>
+      <p:grpSpPr/>
+      <p:sp>
+        <p:nvSpPr>
+          <p:cNvPr id="2" name="Rectangle 1"/>
+          <p:cNvSpPr/>
+          <p:nvPr/>
+        </p:nvSpPr>
+        <p:spPr>
+          <a:xfrm>
+            <a:off x="0" y="0"/>
+            <a:ext cx="12191695" cy="6858000"/>
+          </a:xfrm>
+          <a:prstGeom prst="rect">
+            <a:avLst/>
+          </a:prstGeom>
+          <a:solidFill>
+            <a:srgbClr val="0C0F14"/>
+          </a:solidFill>
+          <a:ln>
+            <a:noFill/>
+          </a:ln>
+          <a:effectLst/>
+        </p:spPr>
+        <p:style>
+          <a:lnRef idx="1">
+            <a:schemeClr val="accent1"/>
+          </a:lnRef>
+          <a:fillRef idx="3">
+            <a:schemeClr val="accent1"/>
+          </a:fillRef>
+          <a:effectRef idx="2">
+            <a:schemeClr val="accent1"/>
+          </a:effectRef>
+          <a:fontRef idx="minor">
+            <a:schemeClr val="lt1"/>
+          </a:fontRef>
+        </p:style>
+        <p:txBody>
+          <a:bodyPr rtlCol="0" anchor="ctr"/>
+          <a:lstStyle/>
+          <a:p>
+            <a:pPr algn="ctr"/>
+          </a:p>
+        </p:txBody>
+      </p:sp>
       <p:pic>
         <p:nvPicPr>
           <p:cNvPr id="3" name="Picture 2" descr="cover.png"/>
@@ -7097,7 +7591,7 @@
                 </a:solidFill>
                 <a:latin typeface="Consolas"/>
               </a:rPr>
-              <a:t>   90,194.58 - 100,000   =  +2,168.00 -11,952.00 - 15.12 - 6.30</a:t>
+              <a:t>   87,631.14 - 100,000   =  -70.00 -12,265.15 - 33.71 - -0.00</a:t>
             </a:r>
           </a:p>
           <a:p>
@@ -7209,7 +7703,7 @@
                 </a:solidFill>
                 <a:latin typeface="Georgia"/>
               </a:rPr>
-              <a:t>summed from the account's own FEE bookings (298 of them), never from a rate.</a:t>
+              <a:t>summed from the account's own FEE bookings (628 of them), never from a rate.</a:t>
             </a:r>
           </a:p>
         </p:txBody>
@@ -7436,7 +7930,7 @@
                 </a:solidFill>
                 <a:latin typeface="Georgia"/>
               </a:rPr>
-              <a:t>Seven defects, each with its measurement</a:t>
+              <a:t>Seventeen defects, each with its measurement</a:t>
             </a:r>
           </a:p>
         </p:txBody>
@@ -7494,7 +7988,7 @@
         <p:spPr>
           <a:xfrm>
             <a:off x="731520" y="2148840"/>
-            <a:ext cx="10698480" cy="1857755"/>
+            <a:ext cx="10698480" cy="2078735"/>
           </a:xfrm>
           <a:prstGeom prst="rect">
             <a:avLst/>
@@ -7540,7 +8034,7 @@
         <p:spPr>
           <a:xfrm>
             <a:off x="914400" y="2258568"/>
-            <a:ext cx="10332720" cy="1857755"/>
+            <a:ext cx="10332720" cy="2078735"/>
           </a:xfrm>
           <a:prstGeom prst="rect">
             <a:avLst/>
@@ -7664,6 +8158,22 @@
               <a:t>8a84e63  the batch had no size                   102 legs &gt; limit 100, 93 min down</a:t>
             </a:r>
           </a:p>
+          <a:p>
+            <a:pPr>
+              <a:lnSpc>
+                <a:spcPct val="125000"/>
+              </a:lnSpc>
+            </a:pPr>
+            <a:r>
+              <a:rPr sz="1200">
+                <a:solidFill>
+                  <a:srgbClr val="8A94A5"/>
+                </a:solidFill>
+                <a:latin typeface="Consolas"/>
+              </a:rPr>
+              <a:t>32977da  a guard that fired only at the cap      500 rows returned, 831 exist</a:t>
+            </a:r>
+          </a:p>
         </p:txBody>
       </p:sp>
       <p:sp>
@@ -7674,7 +8184,7 @@
         </p:nvSpPr>
         <p:spPr>
           <a:xfrm>
-            <a:off x="731520" y="4343400"/>
+            <a:off x="731520" y="4572000"/>
             <a:ext cx="10698480" cy="502920"/>
           </a:xfrm>
           <a:prstGeom prst="rect">
@@ -7709,7 +8219,7 @@
                 </a:solidFill>
                 <a:latin typeface="Georgia"/>
               </a:rPr>
-              <a:t>built from the account data behind it. 93 tests.</a:t>
+              <a:t>built from the account data behind it. 107 tests.</a:t>
             </a:r>
           </a:p>
         </p:txBody>
@@ -7722,7 +8232,7 @@
         </p:nvSpPr>
         <p:spPr>
           <a:xfrm>
-            <a:off x="731520" y="4946904"/>
+            <a:off x="731520" y="5175504"/>
             <a:ext cx="10698480" cy="502920"/>
           </a:xfrm>
           <a:prstGeom prst="rect">
@@ -7748,7 +8258,7 @@
                 </a:solidFill>
                 <a:latin typeface="Georgia"/>
               </a:rPr>
-              <a:t>The worst one was not a wrong number  </a:t>
+              <a:t>The worst was not a wrong number  </a:t>
             </a:r>
             <a:r>
               <a:rPr sz="1600" b="0">
@@ -7757,7 +8267,7 @@
                 </a:solidFill>
                 <a:latin typeface="Georgia"/>
               </a:rPr>
-              <a:t>— it was 93 minutes of a trading agent silently not trading.</a:t>
+              <a:t>— it was 93 minutes of a trading agent silently not trading. Nine more arrived on the last day; next slide.</a:t>
             </a:r>
           </a:p>
         </p:txBody>
@@ -7858,7 +8368,7 @@
                 </a:solidFill>
                 <a:latin typeface="Consolas"/>
               </a:rPr>
-              <a:t>WHAT THE MEASURING FOUND</a:t>
+              <a:t>THE LAST MORNING</a:t>
             </a:r>
           </a:p>
         </p:txBody>
@@ -7897,7 +8407,7 @@
                 </a:solidFill>
                 <a:latin typeface="Georgia"/>
               </a:rPr>
-              <a:t>The backtest never paid the bid/ask</a:t>
+              <a:t>Nine more, and each was invisible where you would look</a:t>
             </a:r>
           </a:p>
         </p:txBody>
@@ -7954,8 +8464,8 @@
         </p:nvSpPr>
         <p:spPr>
           <a:xfrm>
-            <a:off x="731520" y="2148840"/>
-            <a:ext cx="10698480" cy="1857756"/>
+            <a:off x="731520" y="2011680"/>
+            <a:ext cx="10698480" cy="2299715"/>
           </a:xfrm>
           <a:prstGeom prst="rect">
             <a:avLst/>
@@ -8000,8 +8510,8 @@
         </p:nvSpPr>
         <p:spPr>
           <a:xfrm>
-            <a:off x="914400" y="2258568"/>
-            <a:ext cx="10332720" cy="1857756"/>
+            <a:off x="914400" y="2121408"/>
+            <a:ext cx="10332720" cy="2299715"/>
           </a:xfrm>
           <a:prstGeom prst="rect">
             <a:avLst/>
@@ -8020,13 +8530,13 @@
               </a:lnSpc>
             </a:pPr>
             <a:r>
-              <a:rPr sz="1400">
+              <a:rPr sz="1200">
                 <a:solidFill>
                   <a:srgbClr val="E8ECF2"/>
                 </a:solidFill>
                 <a:latin typeface="Consolas"/>
               </a:rPr>
-              <a:t>SPY put grid, 2024-02..2026-08, one parameter changed:</a:t>
+              <a:t>an anchor-to-anchor cut deleted activities()   39 insertions, 54 deletions</a:t>
             </a:r>
           </a:p>
           <a:p>
@@ -8036,13 +8546,13 @@
               </a:lnSpc>
             </a:pPr>
             <a:r>
-              <a:rPr sz="1400">
+              <a:rPr sz="1200">
                 <a:solidFill>
                   <a:srgbClr val="E8ECF2"/>
                 </a:solidFill>
                 <a:latin typeface="Consolas"/>
               </a:rPr>
-              <a:t/>
+              <a:t>a live path read C:/Users/.../env.txt          4 of 25 instruments halted</a:t>
             </a:r>
           </a:p>
           <a:p>
@@ -8052,13 +8562,13 @@
               </a:lnSpc>
             </a:pPr>
             <a:r>
-              <a:rPr sz="1400">
+              <a:rPr sz="1200">
                 <a:solidFill>
                   <a:srgbClr val="E8ECF2"/>
                 </a:solidFill>
                 <a:latin typeface="Consolas"/>
               </a:rPr>
-              <a:t>   cost per spread per execution      realized      drawdown</a:t>
+              <a:t>assignment deadlocked its own instrument       halt -&gt; never reaches the gate</a:t>
             </a:r>
           </a:p>
           <a:p>
@@ -8068,13 +8578,13 @@
               </a:lnSpc>
             </a:pPr>
             <a:r>
-              <a:rPr sz="1400">
+              <a:rPr sz="1200">
                 <a:solidFill>
                   <a:srgbClr val="E8ECF2"/>
                 </a:solidFill>
                 <a:latin typeface="Consolas"/>
               </a:rPr>
-              <a:t>   0     &lt;- every published run       +2,850.00        -2,994</a:t>
+              <a:t>one shared snapshot, two directions            both would have bought 100 AMZN</a:t>
             </a:r>
           </a:p>
           <a:p>
@@ -8084,13 +8594,13 @@
               </a:lnSpc>
             </a:pPr>
             <a:r>
-              <a:rPr sz="1400">
+              <a:rPr sz="1200">
                 <a:solidFill>
                   <a:srgbClr val="E8ECF2"/>
                 </a:solidFill>
                 <a:latin typeface="Consolas"/>
               </a:rPr>
-              <a:t>   17.00    median-based                -433.00        -3,716</a:t>
+              <a:t>the BROKER closed legs with its own ids        3 fills at 19:45:07Z, not ours</a:t>
             </a:r>
           </a:p>
           <a:p>
@@ -8100,13 +8610,61 @@
               </a:lnSpc>
             </a:pPr>
             <a:r>
-              <a:rPr sz="1400">
+              <a:rPr sz="1200">
                 <a:solidFill>
                   <a:srgbClr val="E8ECF2"/>
                 </a:solidFill>
                 <a:latin typeface="Consolas"/>
               </a:rPr>
-              <a:t>   34.95    MEASURED on the live book -6,172.65        -7,024</a:t>
+              <a:t>an assignment's premium counted twice          identity 927.00 out, to the cent</a:t>
+            </a:r>
+          </a:p>
+          <a:p>
+            <a:pPr>
+              <a:lnSpc>
+                <a:spcPct val="125000"/>
+              </a:lnSpc>
+            </a:pPr>
+            <a:r>
+              <a:rPr sz="1200">
+                <a:solidFill>
+                  <a:srgbClr val="E8ECF2"/>
+                </a:solidFill>
+                <a:latin typeface="Consolas"/>
+              </a:rPr>
+              <a:t>today's bars asked for before the open         start cannot be after end: 400</a:t>
+            </a:r>
+          </a:p>
+          <a:p>
+            <a:pPr>
+              <a:lnSpc>
+                <a:spcPct val="125000"/>
+              </a:lnSpc>
+            </a:pPr>
+            <a:r>
+              <a:rPr sz="1200">
+                <a:solidFill>
+                  <a:srgbClr val="E8ECF2"/>
+                </a:solidFill>
+                <a:latin typeface="Consolas"/>
+              </a:rPr>
+              <a:t>a CDN edge served a two-day-old snapshot       curl 07:09, the page 09-01</a:t>
+            </a:r>
+          </a:p>
+          <a:p>
+            <a:pPr>
+              <a:lnSpc>
+                <a:spcPct val="125000"/>
+              </a:lnSpc>
+            </a:pPr>
+            <a:r>
+              <a:rPr sz="1200">
+                <a:solidFill>
+                  <a:srgbClr val="E8ECF2"/>
+                </a:solidFill>
+                <a:latin typeface="Consolas"/>
+              </a:rPr>
+              <a:t>the publish task ran in C:\Windows\System32     WinError 5 every five minutes</a:t>
             </a:r>
           </a:p>
         </p:txBody>
@@ -8119,7 +8677,7 @@
         </p:nvSpPr>
         <p:spPr>
           <a:xfrm>
-            <a:off x="731520" y="4160520"/>
+            <a:off x="731520" y="4709160"/>
             <a:ext cx="10698480" cy="502920"/>
           </a:xfrm>
           <a:prstGeom prst="rect">
@@ -8145,7 +8703,7 @@
                 </a:solidFill>
                 <a:latin typeface="Georgia"/>
               </a:rPr>
-              <a:t>34.95 USD  </a:t>
+              <a:t>None was found by reading code.  </a:t>
             </a:r>
             <a:r>
               <a:rPr sz="1600" b="0">
@@ -8154,7 +8712,7 @@
                 </a:solidFill>
                 <a:latin typeface="Georgia"/>
               </a:rPr>
-              <a:t>is half the bid/ask per spread, measured across 188 open legs. 69.89 round trip. Median quote width 4.9 % of mid.</a:t>
+              <a:t>Each was found by asking the account a question and comparing the answer to what the code assumed.</a:t>
             </a:r>
           </a:p>
         </p:txBody>
@@ -8167,7 +8725,7 @@
         </p:nvSpPr>
         <p:spPr>
           <a:xfrm>
-            <a:off x="731520" y="4818888"/>
+            <a:off x="731520" y="5422392"/>
             <a:ext cx="10698480" cy="502920"/>
           </a:xfrm>
           <a:prstGeom prst="rect">
@@ -8193,7 +8751,7 @@
                 </a:solidFill>
                 <a:latin typeface="Georgia"/>
               </a:rPr>
-              <a:t>The whole published profit  </a:t>
+              <a:t>And one of my own explanations was wrong.  </a:t>
             </a:r>
             <a:r>
               <a:rPr sz="1600" b="0">
@@ -8202,55 +8760,7 @@
                 </a:solidFill>
                 <a:latin typeface="Georgia"/>
               </a:rPr>
-              <a:t>was smaller than the cost that was never charged. cost_usd now has no default anywhere — every tool refuses to start without it.</a:t>
-            </a:r>
-          </a:p>
-        </p:txBody>
-      </p:sp>
-      <p:sp>
-        <p:nvSpPr>
-          <p:cNvPr id="10" name="TextBox 9"/>
-          <p:cNvSpPr txBox="1"/>
-          <p:nvPr/>
-        </p:nvSpPr>
-        <p:spPr>
-          <a:xfrm>
-            <a:off x="731520" y="5477256"/>
-            <a:ext cx="10698480" cy="502920"/>
-          </a:xfrm>
-          <a:prstGeom prst="rect">
-            <a:avLst/>
-          </a:prstGeom>
-          <a:noFill/>
-        </p:spPr>
-        <p:txBody>
-          <a:bodyPr wrap="square">
-            <a:spAutoFit/>
-          </a:bodyPr>
-          <a:lstStyle/>
-          <a:p>
-            <a:pPr algn="l">
-              <a:lnSpc>
-                <a:spcPct val="115000"/>
-              </a:lnSpc>
-            </a:pPr>
-            <a:r>
-              <a:rPr sz="1600" b="1">
-                <a:solidFill>
-                  <a:srgbClr val="8AA6EF"/>
-                </a:solidFill>
-                <a:latin typeface="Georgia"/>
-              </a:rPr>
-              <a:t>And two fixes I proposed  </a:t>
-            </a:r>
-            <a:r>
-              <a:rPr sz="1600" b="0">
-                <a:solidFill>
-                  <a:srgbClr val="E8ECF2"/>
-                </a:solidFill>
-                <a:latin typeface="Georgia"/>
-              </a:rPr>
-              <a:t>were refuted by their own tests. Both are in the log, with the tables that killed them.</a:t>
+              <a:t>The fix I proposed for the premium made the gap worse, 373 to 567 — so the experiment refuted me, and the log says so.</a:t>
             </a:r>
           </a:p>
         </p:txBody>

--- a/docs/deck.pptx
+++ b/docs/deck.pptx
@@ -3416,7 +3416,7 @@
                 </a:solidFill>
                 <a:latin typeface="Consolas"/>
               </a:rPr>
-              <a:t>87,631</a:t>
+              <a:t>87,625</a:t>
             </a:r>
           </a:p>
         </p:txBody>
@@ -3494,7 +3494,7 @@
                 </a:solidFill>
                 <a:latin typeface="Consolas"/>
               </a:rPr>
-              <a:t>-12,369</a:t>
+              <a:t>-12,375</a:t>
             </a:r>
           </a:p>
         </p:txBody>
@@ -3737,7 +3737,7 @@
                 </a:solidFill>
                 <a:latin typeface="Consolas"/>
               </a:rPr>
-              <a:t>Alpaca AI Trading Agents Hackathon  ·  paper account PA3S85G7JUS0  ·  every figure read back through the Alpaca CLI  ·  as of 2026-09-03 07:35 ET</a:t>
+              <a:t>Alpaca AI Trading Agents Hackathon  ·  paper account PA3S85G7JUS0  ·  every figure read back through the Alpaca CLI  ·  as of 2026-09-03 07:40 ET</a:t>
             </a:r>
           </a:p>
         </p:txBody>
@@ -4684,7 +4684,7 @@
                 </a:solidFill>
                 <a:latin typeface="Consolas"/>
               </a:rPr>
-              <a:t>87,631</a:t>
+              <a:t>87,625</a:t>
             </a:r>
           </a:p>
         </p:txBody>
@@ -4762,7 +4762,7 @@
                 </a:solidFill>
                 <a:latin typeface="Consolas"/>
               </a:rPr>
-              <a:t>-12,369  (-12.37 %)</a:t>
+              <a:t>-12,375  (-12.37 %)</a:t>
             </a:r>
           </a:p>
         </p:txBody>
@@ -6735,7 +6735,7 @@
         </p:nvSpPr>
         <p:spPr>
           <a:xfrm>
-            <a:off x="731520" y="3886200"/>
+            <a:off x="731520" y="3794760"/>
             <a:ext cx="10698480" cy="502920"/>
           </a:xfrm>
           <a:prstGeom prst="rect">
@@ -6770,7 +6770,7 @@
                 </a:solidFill>
                 <a:latin typeface="Georgia"/>
               </a:rPr>
-              <a:t>And justified it by naming four OTHER instruments.</a:t>
+              <a:t>And justified it by naming four OTHER instruments. No single cluster's state machine can see AMZN, TSLA, GLD and SLV at once. A threshold cannot either.</a:t>
             </a:r>
           </a:p>
         </p:txBody>
@@ -6783,8 +6783,8 @@
         </p:nvSpPr>
         <p:spPr>
           <a:xfrm>
-            <a:off x="731520" y="4489704"/>
-            <a:ext cx="10698480" cy="502920"/>
+            <a:off x="731520" y="4617720"/>
+            <a:ext cx="10698480" cy="365760"/>
           </a:xfrm>
           <a:prstGeom prst="rect">
             <a:avLst/>
@@ -6803,70 +6803,478 @@
               </a:lnSpc>
             </a:pPr>
             <a:r>
-              <a:rPr sz="1600" b="1">
+              <a:rPr sz="1300" b="1">
+                <a:solidFill>
+                  <a:srgbClr val="8A94A5"/>
+                </a:solidFill>
+                <a:latin typeface="Consolas"/>
+              </a:rPr>
+              <a:t>49 DECISIONS SINCE, ALL FROM THE AGENT LOG</a:t>
+            </a:r>
+          </a:p>
+        </p:txBody>
+      </p:sp>
+      <p:sp>
+        <p:nvSpPr>
+          <p:cNvPr id="10" name="TextBox 9"/>
+          <p:cNvSpPr txBox="1"/>
+          <p:nvPr/>
+        </p:nvSpPr>
+        <p:spPr>
+          <a:xfrm>
+            <a:off x="731520" y="4983480"/>
+            <a:ext cx="2139696" cy="274320"/>
+          </a:xfrm>
+          <a:prstGeom prst="rect">
+            <a:avLst/>
+          </a:prstGeom>
+          <a:noFill/>
+        </p:spPr>
+        <p:txBody>
+          <a:bodyPr wrap="square">
+            <a:spAutoFit/>
+          </a:bodyPr>
+          <a:lstStyle/>
+          <a:p>
+            <a:pPr algn="l">
+              <a:lnSpc>
+                <a:spcPct val="115000"/>
+              </a:lnSpc>
+            </a:pPr>
+            <a:r>
+              <a:rPr sz="1100" b="1">
+                <a:solidFill>
+                  <a:srgbClr val="8A94A5"/>
+                </a:solidFill>
+                <a:latin typeface="Consolas"/>
+              </a:rPr>
+              <a:t>UNCHANGED</a:t>
+            </a:r>
+          </a:p>
+        </p:txBody>
+      </p:sp>
+      <p:sp>
+        <p:nvSpPr>
+          <p:cNvPr id="11" name="TextBox 10"/>
+          <p:cNvSpPr txBox="1"/>
+          <p:nvPr/>
+        </p:nvSpPr>
+        <p:spPr>
+          <a:xfrm>
+            <a:off x="731520" y="5239512"/>
+            <a:ext cx="2139696" cy="548640"/>
+          </a:xfrm>
+          <a:prstGeom prst="rect">
+            <a:avLst/>
+          </a:prstGeom>
+          <a:noFill/>
+        </p:spPr>
+        <p:txBody>
+          <a:bodyPr wrap="square">
+            <a:spAutoFit/>
+          </a:bodyPr>
+          <a:lstStyle/>
+          <a:p>
+            <a:pPr algn="l">
+              <a:lnSpc>
+                <a:spcPct val="115000"/>
+              </a:lnSpc>
+            </a:pPr>
+            <a:r>
+              <a:rPr sz="2600" b="1">
+                <a:solidFill>
+                  <a:srgbClr val="8A94A5"/>
+                </a:solidFill>
+                <a:latin typeface="Consolas"/>
+              </a:rPr>
+              <a:t>5</a:t>
+            </a:r>
+          </a:p>
+        </p:txBody>
+      </p:sp>
+      <p:sp>
+        <p:nvSpPr>
+          <p:cNvPr id="12" name="TextBox 11"/>
+          <p:cNvSpPr txBox="1"/>
+          <p:nvPr/>
+        </p:nvSpPr>
+        <p:spPr>
+          <a:xfrm>
+            <a:off x="2871215" y="4983480"/>
+            <a:ext cx="2139696" cy="274320"/>
+          </a:xfrm>
+          <a:prstGeom prst="rect">
+            <a:avLst/>
+          </a:prstGeom>
+          <a:noFill/>
+        </p:spPr>
+        <p:txBody>
+          <a:bodyPr wrap="square">
+            <a:spAutoFit/>
+          </a:bodyPr>
+          <a:lstStyle/>
+          <a:p>
+            <a:pPr algn="l">
+              <a:lnSpc>
+                <a:spcPct val="115000"/>
+              </a:lnSpc>
+            </a:pPr>
+            <a:r>
+              <a:rPr sz="1100" b="1">
+                <a:solidFill>
+                  <a:srgbClr val="8A94A5"/>
+                </a:solidFill>
+                <a:latin typeface="Consolas"/>
+              </a:rPr>
+              <a:t>REDUCED</a:t>
+            </a:r>
+          </a:p>
+        </p:txBody>
+      </p:sp>
+      <p:sp>
+        <p:nvSpPr>
+          <p:cNvPr id="13" name="TextBox 12"/>
+          <p:cNvSpPr txBox="1"/>
+          <p:nvPr/>
+        </p:nvSpPr>
+        <p:spPr>
+          <a:xfrm>
+            <a:off x="2871215" y="5239512"/>
+            <a:ext cx="2139696" cy="548640"/>
+          </a:xfrm>
+          <a:prstGeom prst="rect">
+            <a:avLst/>
+          </a:prstGeom>
+          <a:noFill/>
+        </p:spPr>
+        <p:txBody>
+          <a:bodyPr wrap="square">
+            <a:spAutoFit/>
+          </a:bodyPr>
+          <a:lstStyle/>
+          <a:p>
+            <a:pPr algn="l">
+              <a:lnSpc>
+                <a:spcPct val="115000"/>
+              </a:lnSpc>
+            </a:pPr>
+            <a:r>
+              <a:rPr sz="2600" b="1">
+                <a:solidFill>
+                  <a:srgbClr val="E8ECF2"/>
+                </a:solidFill>
+                <a:latin typeface="Consolas"/>
+              </a:rPr>
+              <a:t>31</a:t>
+            </a:r>
+          </a:p>
+        </p:txBody>
+      </p:sp>
+      <p:sp>
+        <p:nvSpPr>
+          <p:cNvPr id="14" name="TextBox 13"/>
+          <p:cNvSpPr txBox="1"/>
+          <p:nvPr/>
+        </p:nvSpPr>
+        <p:spPr>
+          <a:xfrm>
+            <a:off x="5010912" y="4983480"/>
+            <a:ext cx="2139696" cy="274320"/>
+          </a:xfrm>
+          <a:prstGeom prst="rect">
+            <a:avLst/>
+          </a:prstGeom>
+          <a:noFill/>
+        </p:spPr>
+        <p:txBody>
+          <a:bodyPr wrap="square">
+            <a:spAutoFit/>
+          </a:bodyPr>
+          <a:lstStyle/>
+          <a:p>
+            <a:pPr algn="l">
+              <a:lnSpc>
+                <a:spcPct val="115000"/>
+              </a:lnSpc>
+            </a:pPr>
+            <a:r>
+              <a:rPr sz="1100" b="1">
+                <a:solidFill>
+                  <a:srgbClr val="8A94A5"/>
+                </a:solidFill>
+                <a:latin typeface="Consolas"/>
+              </a:rPr>
+              <a:t>REFUSED TO 0</a:t>
+            </a:r>
+          </a:p>
+        </p:txBody>
+      </p:sp>
+      <p:sp>
+        <p:nvSpPr>
+          <p:cNvPr id="15" name="TextBox 14"/>
+          <p:cNvSpPr txBox="1"/>
+          <p:nvPr/>
+        </p:nvSpPr>
+        <p:spPr>
+          <a:xfrm>
+            <a:off x="5010912" y="5239512"/>
+            <a:ext cx="2139696" cy="548640"/>
+          </a:xfrm>
+          <a:prstGeom prst="rect">
+            <a:avLst/>
+          </a:prstGeom>
+          <a:noFill/>
+        </p:spPr>
+        <p:txBody>
+          <a:bodyPr wrap="square">
+            <a:spAutoFit/>
+          </a:bodyPr>
+          <a:lstStyle/>
+          <a:p>
+            <a:pPr algn="l">
+              <a:lnSpc>
+                <a:spcPct val="115000"/>
+              </a:lnSpc>
+            </a:pPr>
+            <a:r>
+              <a:rPr sz="2600" b="1">
                 <a:solidFill>
                   <a:srgbClr val="8AA6EF"/>
                 </a:solidFill>
+                <a:latin typeface="Consolas"/>
+              </a:rPr>
+              <a:t>13</a:t>
+            </a:r>
+          </a:p>
+        </p:txBody>
+      </p:sp>
+      <p:sp>
+        <p:nvSpPr>
+          <p:cNvPr id="16" name="TextBox 15"/>
+          <p:cNvSpPr txBox="1"/>
+          <p:nvPr/>
+        </p:nvSpPr>
+        <p:spPr>
+          <a:xfrm>
+            <a:off x="7150607" y="4983480"/>
+            <a:ext cx="2139696" cy="274320"/>
+          </a:xfrm>
+          <a:prstGeom prst="rect">
+            <a:avLst/>
+          </a:prstGeom>
+          <a:noFill/>
+        </p:spPr>
+        <p:txBody>
+          <a:bodyPr wrap="square">
+            <a:spAutoFit/>
+          </a:bodyPr>
+          <a:lstStyle/>
+          <a:p>
+            <a:pPr algn="l">
+              <a:lnSpc>
+                <a:spcPct val="115000"/>
+              </a:lnSpc>
+            </a:pPr>
+            <a:r>
+              <a:rPr sz="1100" b="1">
+                <a:solidFill>
+                  <a:srgbClr val="8A94A5"/>
+                </a:solidFill>
+                <a:latin typeface="Consolas"/>
+              </a:rPr>
+              <a:t>CONTRACTS ASKED</a:t>
+            </a:r>
+          </a:p>
+        </p:txBody>
+      </p:sp>
+      <p:sp>
+        <p:nvSpPr>
+          <p:cNvPr id="17" name="TextBox 16"/>
+          <p:cNvSpPr txBox="1"/>
+          <p:nvPr/>
+        </p:nvSpPr>
+        <p:spPr>
+          <a:xfrm>
+            <a:off x="7150607" y="5239512"/>
+            <a:ext cx="2139696" cy="548640"/>
+          </a:xfrm>
+          <a:prstGeom prst="rect">
+            <a:avLst/>
+          </a:prstGeom>
+          <a:noFill/>
+        </p:spPr>
+        <p:txBody>
+          <a:bodyPr wrap="square">
+            <a:spAutoFit/>
+          </a:bodyPr>
+          <a:lstStyle/>
+          <a:p>
+            <a:pPr algn="l">
+              <a:lnSpc>
+                <a:spcPct val="115000"/>
+              </a:lnSpc>
+            </a:pPr>
+            <a:r>
+              <a:rPr sz="2600" b="1">
+                <a:solidFill>
+                  <a:srgbClr val="8A94A5"/>
+                </a:solidFill>
+                <a:latin typeface="Consolas"/>
+              </a:rPr>
+              <a:t>108</a:t>
+            </a:r>
+          </a:p>
+        </p:txBody>
+      </p:sp>
+      <p:sp>
+        <p:nvSpPr>
+          <p:cNvPr id="18" name="TextBox 17"/>
+          <p:cNvSpPr txBox="1"/>
+          <p:nvPr/>
+        </p:nvSpPr>
+        <p:spPr>
+          <a:xfrm>
+            <a:off x="9290304" y="4983480"/>
+            <a:ext cx="2139696" cy="274320"/>
+          </a:xfrm>
+          <a:prstGeom prst="rect">
+            <a:avLst/>
+          </a:prstGeom>
+          <a:noFill/>
+        </p:spPr>
+        <p:txBody>
+          <a:bodyPr wrap="square">
+            <a:spAutoFit/>
+          </a:bodyPr>
+          <a:lstStyle/>
+          <a:p>
+            <a:pPr algn="l">
+              <a:lnSpc>
+                <a:spcPct val="115000"/>
+              </a:lnSpc>
+            </a:pPr>
+            <a:r>
+              <a:rPr sz="1100" b="1">
+                <a:solidFill>
+                  <a:srgbClr val="8A94A5"/>
+                </a:solidFill>
+                <a:latin typeface="Consolas"/>
+              </a:rPr>
+              <a:t>ALLOWED</a:t>
+            </a:r>
+          </a:p>
+        </p:txBody>
+      </p:sp>
+      <p:sp>
+        <p:nvSpPr>
+          <p:cNvPr id="19" name="TextBox 18"/>
+          <p:cNvSpPr txBox="1"/>
+          <p:nvPr/>
+        </p:nvSpPr>
+        <p:spPr>
+          <a:xfrm>
+            <a:off x="9290304" y="5239512"/>
+            <a:ext cx="2139696" cy="548640"/>
+          </a:xfrm>
+          <a:prstGeom prst="rect">
+            <a:avLst/>
+          </a:prstGeom>
+          <a:noFill/>
+        </p:spPr>
+        <p:txBody>
+          <a:bodyPr wrap="square">
+            <a:spAutoFit/>
+          </a:bodyPr>
+          <a:lstStyle/>
+          <a:p>
+            <a:pPr algn="l">
+              <a:lnSpc>
+                <a:spcPct val="115000"/>
+              </a:lnSpc>
+            </a:pPr>
+            <a:r>
+              <a:rPr sz="2600" b="1">
+                <a:solidFill>
+                  <a:srgbClr val="8AA6EF"/>
+                </a:solidFill>
+                <a:latin typeface="Consolas"/>
+              </a:rPr>
+              <a:t>38</a:t>
+            </a:r>
+          </a:p>
+        </p:txBody>
+      </p:sp>
+      <p:sp>
+        <p:nvSpPr>
+          <p:cNvPr id="20" name="TextBox 19"/>
+          <p:cNvSpPr txBox="1"/>
+          <p:nvPr/>
+        </p:nvSpPr>
+        <p:spPr>
+          <a:xfrm>
+            <a:off x="731520" y="5897880"/>
+            <a:ext cx="10698480" cy="457200"/>
+          </a:xfrm>
+          <a:prstGeom prst="rect">
+            <a:avLst/>
+          </a:prstGeom>
+          <a:noFill/>
+        </p:spPr>
+        <p:txBody>
+          <a:bodyPr wrap="square">
+            <a:spAutoFit/>
+          </a:bodyPr>
+          <a:lstStyle/>
+          <a:p>
+            <a:pPr algn="l">
+              <a:lnSpc>
+                <a:spcPct val="115000"/>
+              </a:lnSpc>
+            </a:pPr>
+            <a:r>
+              <a:rPr sz="1500" b="0">
+                <a:solidFill>
+                  <a:srgbClr val="8A94A5"/>
+                </a:solidFill>
                 <a:latin typeface="Georgia"/>
               </a:rPr>
-              <a:t>That is the whole argument.  </a:t>
-            </a:r>
-            <a:r>
-              <a:rPr sz="1600" b="0">
+              <a:t>Twice it failed and passed the request through untouched, loudly: </a:t>
+            </a:r>
+            <a:r>
+              <a:rPr sz="1500" b="0">
                 <a:solidFill>
                   <a:srgbClr val="E8ECF2"/>
                 </a:solidFill>
+                <a:latin typeface="Consolas"/>
+              </a:rPr>
+              <a:t>3 -&gt; 3, no JSON object in answer</a:t>
+            </a:r>
+            <a:r>
+              <a:rPr sz="1500" b="0">
+                <a:solidFill>
+                  <a:srgbClr val="8A94A5"/>
+                </a:solidFill>
                 <a:latin typeface="Georgia"/>
               </a:rPr>
-              <a:t>No single cluster's state machine can see AMZN, TSLA, GLD and SLV at once. A threshold cannot either.</a:t>
-            </a:r>
-          </a:p>
-        </p:txBody>
-      </p:sp>
-      <p:sp>
-        <p:nvSpPr>
-          <p:cNvPr id="10" name="TextBox 9"/>
-          <p:cNvSpPr txBox="1"/>
-          <p:nvPr/>
-        </p:nvSpPr>
-        <p:spPr>
-          <a:xfrm>
-            <a:off x="731520" y="5093208"/>
-            <a:ext cx="10698480" cy="502920"/>
-          </a:xfrm>
-          <a:prstGeom prst="rect">
-            <a:avLst/>
-          </a:prstGeom>
-          <a:noFill/>
-        </p:spPr>
-        <p:txBody>
-          <a:bodyPr wrap="square">
-            <a:spAutoFit/>
-          </a:bodyPr>
-          <a:lstStyle/>
-          <a:p>
-            <a:pPr algn="l">
-              <a:lnSpc>
-                <a:spcPct val="115000"/>
-              </a:lnSpc>
-            </a:pPr>
-            <a:r>
-              <a:rPr sz="1600" b="1">
-                <a:solidFill>
-                  <a:srgbClr val="8AA6EF"/>
+              <a:t>  and  </a:t>
+            </a:r>
+            <a:r>
+              <a:rPr sz="1500" b="0">
+                <a:solidFill>
+                  <a:srgbClr val="E8ECF2"/>
+                </a:solidFill>
+                <a:latin typeface="Consolas"/>
+              </a:rPr>
+              <a:t>1 -&gt; 1, read timed out</a:t>
+            </a:r>
+            <a:r>
+              <a:rPr sz="1500" b="0">
+                <a:solidFill>
+                  <a:srgbClr val="8A94A5"/>
                 </a:solidFill>
                 <a:latin typeface="Georgia"/>
               </a:rPr>
-              <a:t>10.1 seconds.  </a:t>
-            </a:r>
-            <a:r>
-              <a:rPr sz="1600" b="0">
-                <a:solidFill>
-                  <a:srgbClr val="E8ECF2"/>
-                </a:solidFill>
-                <a:latin typeface="Georgia"/>
-              </a:rPr>
-              <a:t>Measured 4.03 s before it went live; the real view carries all 25 clusters. Hence: at most three consults per poll.</a:t>
+              <a:t>. Failing closed would make an outage a silent strategy change.</a:t>
             </a:r>
           </a:p>
         </p:txBody>
@@ -7591,7 +7999,7 @@
                 </a:solidFill>
                 <a:latin typeface="Consolas"/>
               </a:rPr>
-              <a:t>   87,631.14 - 100,000   =  -70.00 -12,265.15 - 33.71 - -0.00</a:t>
+              <a:t>   87,625.29 - 100,000   =  -70.00 -12,271.00 - 33.71 - -0.00</a:t>
             </a:r>
           </a:p>
           <a:p>

--- a/docs/deck.pptx
+++ b/docs/deck.pptx
@@ -3416,7 +3416,7 @@
                 </a:solidFill>
                 <a:latin typeface="Consolas"/>
               </a:rPr>
-              <a:t>87,625</a:t>
+              <a:t>87,817</a:t>
             </a:r>
           </a:p>
         </p:txBody>
@@ -3494,7 +3494,7 @@
                 </a:solidFill>
                 <a:latin typeface="Consolas"/>
               </a:rPr>
-              <a:t>-12,375</a:t>
+              <a:t>-12,183</a:t>
             </a:r>
           </a:p>
         </p:txBody>
@@ -3737,7 +3737,7 @@
                 </a:solidFill>
                 <a:latin typeface="Consolas"/>
               </a:rPr>
-              <a:t>Alpaca AI Trading Agents Hackathon  ·  paper account PA3S85G7JUS0  ·  every figure read back through the Alpaca CLI  ·  as of 2026-09-03 07:40 ET</a:t>
+              <a:t>Alpaca AI Trading Agents Hackathon  ·  paper account PA3S85G7JUS0  ·  every figure read back through the Alpaca CLI  ·  as of 2026-09-03 08:05 ET</a:t>
             </a:r>
           </a:p>
         </p:txBody>
@@ -4684,7 +4684,7 @@
                 </a:solidFill>
                 <a:latin typeface="Consolas"/>
               </a:rPr>
-              <a:t>87,625</a:t>
+              <a:t>87,817</a:t>
             </a:r>
           </a:p>
         </p:txBody>
@@ -4762,7 +4762,7 @@
                 </a:solidFill>
                 <a:latin typeface="Consolas"/>
               </a:rPr>
-              <a:t>-12,375  (-12.37 %)</a:t>
+              <a:t>-12,183  (-12.18 %)</a:t>
             </a:r>
           </a:p>
         </p:txBody>
@@ -5001,8 +5001,8 @@
         </p:blipFill>
         <p:spPr>
           <a:xfrm>
-            <a:off x="731520" y="1371600"/>
-            <a:ext cx="10698480" cy="5616702"/>
+            <a:off x="1741561" y="1325880"/>
+            <a:ext cx="8708571" cy="4572000"/>
           </a:xfrm>
           <a:prstGeom prst="rect">
             <a:avLst/>
@@ -5056,8 +5056,8 @@
         </p:nvSpPr>
         <p:spPr>
           <a:xfrm>
-            <a:off x="731520" y="5943600"/>
-            <a:ext cx="10698480" cy="548640"/>
+            <a:off x="640080" y="6035040"/>
+            <a:ext cx="10972800" cy="548640"/>
           </a:xfrm>
           <a:prstGeom prst="rect">
             <a:avLst/>
@@ -5091,7 +5091,7 @@
                 </a:solidFill>
                 <a:latin typeface="Consolas"/>
               </a:rPr>
-              <a:t>   ·   github.com/Hanky27/KangarooOptions   ·   account PA3S85G7JUS0</a:t>
+              <a:t>   ·   github.com/Hanky27/KangarooOptions   ·   PA3S85G7JUS0</a:t>
             </a:r>
           </a:p>
         </p:txBody>
@@ -7999,7 +7999,7 @@
                 </a:solidFill>
                 <a:latin typeface="Consolas"/>
               </a:rPr>
-              <a:t>   87,625.29 - 100,000   =  -70.00 -12,271.00 - 33.71 - -0.00</a:t>
+              <a:t>   87,817.09 - 100,000   =  -70.00 -12,079.20 - 33.71 - 0.00</a:t>
             </a:r>
           </a:p>
           <a:p>
